--- a/public/lessons/year-6-maths/autumn/week-7/check-with-inverse-operations/teaching-powerpoint-v1.pptx
+++ b/public/lessons/year-6-maths/autumn/week-7/check-with-inverse-operations/teaching-powerpoint-v1.pptx
@@ -2,24 +2,24 @@
 <file path=ppt/presentation.xml><?xml version="1.0" encoding="utf-8"?>
 <p:presentation xmlns:p="http://schemas.openxmlformats.org/presentationml/2006/main">
   <p:sldMasterIdLst>
-    <p:sldMasterId xmlns:r="http://schemas.openxmlformats.org/officeDocument/2006/relationships" id="2147483648" r:id="Rd57330a6381d4fd4"/>
+    <p:sldMasterId xmlns:r="http://schemas.openxmlformats.org/officeDocument/2006/relationships" id="2147483648" r:id="Rbcdba2a37b5e4f6f"/>
   </p:sldMasterIdLst>
   <p:notesMasterIdLst>
-    <p:notesMasterId xmlns:r="http://schemas.openxmlformats.org/officeDocument/2006/relationships" r:id="Rcbd10731e76e4416"/>
+    <p:notesMasterId xmlns:r="http://schemas.openxmlformats.org/officeDocument/2006/relationships" r:id="R627d31959ead4aa7"/>
   </p:notesMasterIdLst>
   <p:sldIdLst>
-    <p:sldId xmlns:r="http://schemas.openxmlformats.org/officeDocument/2006/relationships" id="256" r:id="R21aa03cf1fd640e3"/>
-    <p:sldId xmlns:r="http://schemas.openxmlformats.org/officeDocument/2006/relationships" id="257" r:id="Raefc5934dcd64858"/>
-    <p:sldId xmlns:r="http://schemas.openxmlformats.org/officeDocument/2006/relationships" id="258" r:id="R49a98137b04445b7"/>
-    <p:sldId xmlns:r="http://schemas.openxmlformats.org/officeDocument/2006/relationships" id="259" r:id="R6ebb5d3c49084076"/>
-    <p:sldId xmlns:r="http://schemas.openxmlformats.org/officeDocument/2006/relationships" id="260" r:id="Rfd85e0a072bb482d"/>
-    <p:sldId xmlns:r="http://schemas.openxmlformats.org/officeDocument/2006/relationships" id="261" r:id="R13e7ff8db69443f4"/>
-    <p:sldId xmlns:r="http://schemas.openxmlformats.org/officeDocument/2006/relationships" id="262" r:id="R0cd10da3797e49cb"/>
-    <p:sldId xmlns:r="http://schemas.openxmlformats.org/officeDocument/2006/relationships" id="263" r:id="Rdda3a642340d4193"/>
-    <p:sldId xmlns:r="http://schemas.openxmlformats.org/officeDocument/2006/relationships" id="264" r:id="R8fb83d73613940ec"/>
-    <p:sldId xmlns:r="http://schemas.openxmlformats.org/officeDocument/2006/relationships" id="265" r:id="Rc6c145eae1094c64"/>
-    <p:sldId xmlns:r="http://schemas.openxmlformats.org/officeDocument/2006/relationships" id="266" r:id="R62499ad18c294cea"/>
-    <p:sldId xmlns:r="http://schemas.openxmlformats.org/officeDocument/2006/relationships" id="267" r:id="R56ce8037ba42482b"/>
+    <p:sldId xmlns:r="http://schemas.openxmlformats.org/officeDocument/2006/relationships" id="256" r:id="R9bd1e53ede164a2f"/>
+    <p:sldId xmlns:r="http://schemas.openxmlformats.org/officeDocument/2006/relationships" id="257" r:id="R4936dd2b29e74d6d"/>
+    <p:sldId xmlns:r="http://schemas.openxmlformats.org/officeDocument/2006/relationships" id="258" r:id="R80906fd8b45243b3"/>
+    <p:sldId xmlns:r="http://schemas.openxmlformats.org/officeDocument/2006/relationships" id="259" r:id="Red9de569833e4dc4"/>
+    <p:sldId xmlns:r="http://schemas.openxmlformats.org/officeDocument/2006/relationships" id="260" r:id="R2b334becb40d46e8"/>
+    <p:sldId xmlns:r="http://schemas.openxmlformats.org/officeDocument/2006/relationships" id="261" r:id="Ra9ca64e17e5a4ea2"/>
+    <p:sldId xmlns:r="http://schemas.openxmlformats.org/officeDocument/2006/relationships" id="262" r:id="R729ee328cd634430"/>
+    <p:sldId xmlns:r="http://schemas.openxmlformats.org/officeDocument/2006/relationships" id="263" r:id="R4a7aa917a35f467d"/>
+    <p:sldId xmlns:r="http://schemas.openxmlformats.org/officeDocument/2006/relationships" id="264" r:id="Rfa8000fee5f247c1"/>
+    <p:sldId xmlns:r="http://schemas.openxmlformats.org/officeDocument/2006/relationships" id="265" r:id="R47edca58149c4b34"/>
+    <p:sldId xmlns:r="http://schemas.openxmlformats.org/officeDocument/2006/relationships" id="266" r:id="Rfa9506718b4a4097"/>
+    <p:sldId xmlns:r="http://schemas.openxmlformats.org/officeDocument/2006/relationships" id="267" r:id="R143c7b238f404437"/>
   </p:sldIdLst>
   <p:sldSz cx="12192000" cy="6858000"/>
   <p:notesSz cx="6858000" cy="9144000"/>
@@ -873,7 +873,7 @@
           <a:lstStyle xmlns:a="http://schemas.openxmlformats.org/drawingml/2006/main"/>
           <a:p xmlns:a="http://schemas.openxmlformats.org/drawingml/2006/main">
             <a:r>
-              <a:t>I do. Reveal the question, setup and each calculation stage one click at a time. Pupils watch before copying. Model answer: 294 x 24 = 7,056, so the quotient is correct.</a:t>
+              <a:t>I do. Reveal the question, then reveal each mathematical change one click at a time. Point to the numbers and operation that changed before moving to the next line. Final answer: 294 x 24 = 7,056, so the quotient is correct.</a:t>
             </a:r>
           </a:p>
         </p:txBody>
@@ -1291,7 +1291,7 @@
   </p:cSld>
   <p:clrMap bg1="lt1" tx1="dk1" bg2="lt2" tx2="dk2" accent1="accent1" accent2="accent2" accent3="accent3" accent4="accent4" accent5="accent5" accent6="accent6" hlink="hlink" folHlink="folHlink"/>
   <p:sldLayoutIdLst>
-    <p:sldLayoutId xmlns:r="http://schemas.openxmlformats.org/officeDocument/2006/relationships" id="2147483649" r:id="R0027c4e4c1544d43"/>
+    <p:sldLayoutId xmlns:r="http://schemas.openxmlformats.org/officeDocument/2006/relationships" id="2147483649" r:id="R5d97c8a1da624978"/>
   </p:sldLayoutIdLst>
   <p:txStyles>
     <p:titleStyle>
@@ -1842,7 +1842,7 @@
           <p:cNvPr id="12" name="">
             <a:extLst xmlns:a="http://schemas.openxmlformats.org/drawingml/2006/main">
               <a:ext uri="{FF2B5EF4-FFF2-40B4-BE49-F238E27FC236}">
-                <a16:creationId xmlns:a16="http://schemas.microsoft.com/office/drawing/2014/main" id="{111B7D57-B300-44A6-96EF-68063F8B6B35}"/>
+                <a16:creationId xmlns:a16="http://schemas.microsoft.com/office/drawing/2014/main" id="{1B538BFE-36E9-4749-9302-F650DFFBA451}"/>
               </a:ext>
             </a:extLst>
           </p:cNvPr>
@@ -1874,7 +1874,7 @@
           <p:cNvPr id="2" name="">
             <a:extLst xmlns:a="http://schemas.openxmlformats.org/drawingml/2006/main">
               <a:ext uri="{FF2B5EF4-FFF2-40B4-BE49-F238E27FC236}">
-                <a16:creationId xmlns:a16="http://schemas.microsoft.com/office/drawing/2014/main" id="{2E23ED3D-C2F0-41C7-9F2C-6CFD5C7C4388}"/>
+                <a16:creationId xmlns:a16="http://schemas.microsoft.com/office/drawing/2014/main" id="{ECC71B3A-0F37-4C48-9293-7935BE211A4D}"/>
               </a:ext>
             </a:extLst>
           </p:cNvPr>
@@ -1931,7 +1931,7 @@
           <p:cNvPr id="3" name="">
             <a:extLst xmlns:a="http://schemas.openxmlformats.org/drawingml/2006/main">
               <a:ext uri="{FF2B5EF4-FFF2-40B4-BE49-F238E27FC236}">
-                <a16:creationId xmlns:a16="http://schemas.microsoft.com/office/drawing/2014/main" id="{5684D9E5-C7B1-4324-AFA9-CC0EAEB9C070}"/>
+                <a16:creationId xmlns:a16="http://schemas.microsoft.com/office/drawing/2014/main" id="{B79D336A-8988-434C-8382-02B056177962}"/>
               </a:ext>
             </a:extLst>
           </p:cNvPr>
@@ -1965,7 +1965,7 @@
           <p:cNvPr id="4" name="">
             <a:extLst xmlns:a="http://schemas.openxmlformats.org/drawingml/2006/main">
               <a:ext uri="{FF2B5EF4-FFF2-40B4-BE49-F238E27FC236}">
-                <a16:creationId xmlns:a16="http://schemas.microsoft.com/office/drawing/2014/main" id="{19AB025B-1D28-4316-AD1F-6193527948DC}"/>
+                <a16:creationId xmlns:a16="http://schemas.microsoft.com/office/drawing/2014/main" id="{BA394D84-3A98-493E-80DB-2CCD8960B64A}"/>
               </a:ext>
             </a:extLst>
           </p:cNvPr>
@@ -2022,7 +2022,7 @@
           <p:cNvPr id="5" name="">
             <a:extLst xmlns:a="http://schemas.openxmlformats.org/drawingml/2006/main">
               <a:ext uri="{FF2B5EF4-FFF2-40B4-BE49-F238E27FC236}">
-                <a16:creationId xmlns:a16="http://schemas.microsoft.com/office/drawing/2014/main" id="{EC35A035-2A07-404A-8050-A5CB1F30CE26}"/>
+                <a16:creationId xmlns:a16="http://schemas.microsoft.com/office/drawing/2014/main" id="{B307FFEA-6927-437D-AD72-96BD335CC0C2}"/>
               </a:ext>
             </a:extLst>
           </p:cNvPr>
@@ -2079,7 +2079,7 @@
           <p:cNvPr id="6" name="">
             <a:extLst xmlns:a="http://schemas.openxmlformats.org/drawingml/2006/main">
               <a:ext uri="{FF2B5EF4-FFF2-40B4-BE49-F238E27FC236}">
-                <a16:creationId xmlns:a16="http://schemas.microsoft.com/office/drawing/2014/main" id="{0F20A277-EEB4-41F5-A963-D43D4FB630DD}"/>
+                <a16:creationId xmlns:a16="http://schemas.microsoft.com/office/drawing/2014/main" id="{1258A291-AA75-4312-A7C2-B5F7109734C3}"/>
               </a:ext>
             </a:extLst>
           </p:cNvPr>
@@ -2113,7 +2113,7 @@
           <p:cNvPr id="7" name="">
             <a:extLst xmlns:a="http://schemas.openxmlformats.org/drawingml/2006/main">
               <a:ext uri="{FF2B5EF4-FFF2-40B4-BE49-F238E27FC236}">
-                <a16:creationId xmlns:a16="http://schemas.microsoft.com/office/drawing/2014/main" id="{BD025967-6809-4F9E-9FBD-0F4077C98809}"/>
+                <a16:creationId xmlns:a16="http://schemas.microsoft.com/office/drawing/2014/main" id="{F7A3CCFD-6E43-43C9-A19B-94EF988B1CC6}"/>
               </a:ext>
             </a:extLst>
           </p:cNvPr>
@@ -2170,7 +2170,7 @@
           <p:cNvPr id="8" name="">
             <a:extLst xmlns:a="http://schemas.openxmlformats.org/drawingml/2006/main">
               <a:ext uri="{FF2B5EF4-FFF2-40B4-BE49-F238E27FC236}">
-                <a16:creationId xmlns:a16="http://schemas.microsoft.com/office/drawing/2014/main" id="{AA941B04-08FD-4BCC-999C-D2B2F8FD09E0}"/>
+                <a16:creationId xmlns:a16="http://schemas.microsoft.com/office/drawing/2014/main" id="{6484AAA5-494B-4848-B0EE-D8B158B876E7}"/>
               </a:ext>
             </a:extLst>
           </p:cNvPr>
@@ -2227,7 +2227,7 @@
           <p:cNvPr id="9" name="">
             <a:extLst xmlns:a="http://schemas.openxmlformats.org/drawingml/2006/main">
               <a:ext uri="{FF2B5EF4-FFF2-40B4-BE49-F238E27FC236}">
-                <a16:creationId xmlns:a16="http://schemas.microsoft.com/office/drawing/2014/main" id="{0207A478-A4E7-41CE-B1F9-EC9EF6C45200}"/>
+                <a16:creationId xmlns:a16="http://schemas.microsoft.com/office/drawing/2014/main" id="{C636A31B-2F37-4EB0-88BC-CF69A90C6F9D}"/>
               </a:ext>
             </a:extLst>
           </p:cNvPr>
@@ -2284,7 +2284,7 @@
           <p:cNvPr id="10" name="">
             <a:extLst xmlns:a="http://schemas.openxmlformats.org/drawingml/2006/main">
               <a:ext uri="{FF2B5EF4-FFF2-40B4-BE49-F238E27FC236}">
-                <a16:creationId xmlns:a16="http://schemas.microsoft.com/office/drawing/2014/main" id="{BA3F92D0-439A-4AE9-9BFA-DD8C870B84E4}"/>
+                <a16:creationId xmlns:a16="http://schemas.microsoft.com/office/drawing/2014/main" id="{759042A3-8E4C-4FFB-918D-2184DD2F132F}"/>
               </a:ext>
             </a:extLst>
           </p:cNvPr>
@@ -2341,7 +2341,7 @@
           <p:cNvPr id="11" name="">
             <a:extLst xmlns:a="http://schemas.openxmlformats.org/drawingml/2006/main">
               <a:ext uri="{FF2B5EF4-FFF2-40B4-BE49-F238E27FC236}">
-                <a16:creationId xmlns:a16="http://schemas.microsoft.com/office/drawing/2014/main" id="{1BC8EA6A-D1C8-4499-83B4-2526C9F459AA}"/>
+                <a16:creationId xmlns:a16="http://schemas.microsoft.com/office/drawing/2014/main" id="{07EBC33D-5997-44AC-B5DF-4F292B7B36EB}"/>
               </a:ext>
             </a:extLst>
           </p:cNvPr>
@@ -2396,7 +2396,7 @@
     </p:spTree>
     <p:extLst>
       <p:ext uri="{BB962C8B-B14F-4D97-AF65-F5344CB8AC3E}">
-        <p14:creationId xmlns:p14="http://schemas.microsoft.com/office/powerpoint/2010/main" val="1426054130"/>
+        <p14:creationId xmlns:p14="http://schemas.microsoft.com/office/powerpoint/2010/main" val="1425010460"/>
       </p:ext>
     </p:extLst>
   </p:cSld>
@@ -2427,7 +2427,7 @@
           <p:cNvPr id="14" name="">
             <a:extLst xmlns:a="http://schemas.openxmlformats.org/drawingml/2006/main">
               <a:ext uri="{FF2B5EF4-FFF2-40B4-BE49-F238E27FC236}">
-                <a16:creationId xmlns:a16="http://schemas.microsoft.com/office/drawing/2014/main" id="{126F2C3D-B687-4960-BE8D-4788C3EDD60F}"/>
+                <a16:creationId xmlns:a16="http://schemas.microsoft.com/office/drawing/2014/main" id="{E70FFA16-F5E5-4588-BE78-00392E7768CA}"/>
               </a:ext>
             </a:extLst>
           </p:cNvPr>
@@ -2459,7 +2459,7 @@
           <p:cNvPr id="2" name="">
             <a:extLst xmlns:a="http://schemas.openxmlformats.org/drawingml/2006/main">
               <a:ext uri="{FF2B5EF4-FFF2-40B4-BE49-F238E27FC236}">
-                <a16:creationId xmlns:a16="http://schemas.microsoft.com/office/drawing/2014/main" id="{5F3F844F-342F-4384-B6B4-68F044F919EA}"/>
+                <a16:creationId xmlns:a16="http://schemas.microsoft.com/office/drawing/2014/main" id="{8D2A0117-4C84-4EB9-B9F2-6FF6CD64CE68}"/>
               </a:ext>
             </a:extLst>
           </p:cNvPr>
@@ -2516,7 +2516,7 @@
           <p:cNvPr id="3" name="">
             <a:extLst xmlns:a="http://schemas.openxmlformats.org/drawingml/2006/main">
               <a:ext uri="{FF2B5EF4-FFF2-40B4-BE49-F238E27FC236}">
-                <a16:creationId xmlns:a16="http://schemas.microsoft.com/office/drawing/2014/main" id="{29F586ED-6826-4C43-8E89-9F15CC80170D}"/>
+                <a16:creationId xmlns:a16="http://schemas.microsoft.com/office/drawing/2014/main" id="{CECF52ED-0E13-45C3-9A43-45B03606DFD8}"/>
               </a:ext>
             </a:extLst>
           </p:cNvPr>
@@ -2548,7 +2548,7 @@
           <p:cNvPr id="4" name="">
             <a:extLst xmlns:a="http://schemas.openxmlformats.org/drawingml/2006/main">
               <a:ext uri="{FF2B5EF4-FFF2-40B4-BE49-F238E27FC236}">
-                <a16:creationId xmlns:a16="http://schemas.microsoft.com/office/drawing/2014/main" id="{68A99DA6-0EEE-4232-B893-252C27197FC9}"/>
+                <a16:creationId xmlns:a16="http://schemas.microsoft.com/office/drawing/2014/main" id="{2580F0E1-3737-4008-90D9-38AED718913E}"/>
               </a:ext>
             </a:extLst>
           </p:cNvPr>
@@ -2605,7 +2605,7 @@
           <p:cNvPr id="5" name="">
             <a:extLst xmlns:a="http://schemas.openxmlformats.org/drawingml/2006/main">
               <a:ext uri="{FF2B5EF4-FFF2-40B4-BE49-F238E27FC236}">
-                <a16:creationId xmlns:a16="http://schemas.microsoft.com/office/drawing/2014/main" id="{0628FB2E-B449-4709-BEFB-4F105DE0D6A5}"/>
+                <a16:creationId xmlns:a16="http://schemas.microsoft.com/office/drawing/2014/main" id="{24FE5F13-66DF-4A07-964D-BFA0244BEAC9}"/>
               </a:ext>
             </a:extLst>
           </p:cNvPr>
@@ -2662,7 +2662,7 @@
           <p:cNvPr id="6" name="">
             <a:extLst xmlns:a="http://schemas.openxmlformats.org/drawingml/2006/main">
               <a:ext uri="{FF2B5EF4-FFF2-40B4-BE49-F238E27FC236}">
-                <a16:creationId xmlns:a16="http://schemas.microsoft.com/office/drawing/2014/main" id="{C4122715-2940-40D7-B338-534C68C94888}"/>
+                <a16:creationId xmlns:a16="http://schemas.microsoft.com/office/drawing/2014/main" id="{D75208F8-2414-4C9C-A036-84146B6B01EE}"/>
               </a:ext>
             </a:extLst>
           </p:cNvPr>
@@ -2719,7 +2719,7 @@
           <p:cNvPr id="7" name="">
             <a:extLst xmlns:a="http://schemas.openxmlformats.org/drawingml/2006/main">
               <a:ext uri="{FF2B5EF4-FFF2-40B4-BE49-F238E27FC236}">
-                <a16:creationId xmlns:a16="http://schemas.microsoft.com/office/drawing/2014/main" id="{6EF7B66A-4160-49D0-B6A3-503E6AC1DE21}"/>
+                <a16:creationId xmlns:a16="http://schemas.microsoft.com/office/drawing/2014/main" id="{0928C7C0-B1BB-4C5C-8492-E3A65FA1F2A1}"/>
               </a:ext>
             </a:extLst>
           </p:cNvPr>
@@ -2751,7 +2751,7 @@
           <p:cNvPr id="8" name="">
             <a:extLst xmlns:a="http://schemas.openxmlformats.org/drawingml/2006/main">
               <a:ext uri="{FF2B5EF4-FFF2-40B4-BE49-F238E27FC236}">
-                <a16:creationId xmlns:a16="http://schemas.microsoft.com/office/drawing/2014/main" id="{6F12D3EE-62E6-4CFC-A5DB-DC750756CAB9}"/>
+                <a16:creationId xmlns:a16="http://schemas.microsoft.com/office/drawing/2014/main" id="{630CF729-B165-4B79-9766-F079D07390EF}"/>
               </a:ext>
             </a:extLst>
           </p:cNvPr>
@@ -2808,7 +2808,7 @@
           <p:cNvPr id="9" name="">
             <a:extLst xmlns:a="http://schemas.openxmlformats.org/drawingml/2006/main">
               <a:ext uri="{FF2B5EF4-FFF2-40B4-BE49-F238E27FC236}">
-                <a16:creationId xmlns:a16="http://schemas.microsoft.com/office/drawing/2014/main" id="{048D1D72-30EB-441E-80F5-7C3C028A9D06}"/>
+                <a16:creationId xmlns:a16="http://schemas.microsoft.com/office/drawing/2014/main" id="{D6C41FB4-F910-46C2-A2EC-3679D0AD84E1}"/>
               </a:ext>
             </a:extLst>
           </p:cNvPr>
@@ -2865,7 +2865,7 @@
           <p:cNvPr id="10" name="">
             <a:extLst xmlns:a="http://schemas.openxmlformats.org/drawingml/2006/main">
               <a:ext uri="{FF2B5EF4-FFF2-40B4-BE49-F238E27FC236}">
-                <a16:creationId xmlns:a16="http://schemas.microsoft.com/office/drawing/2014/main" id="{17DF0714-0FEE-4573-897A-544E9AD3A588}"/>
+                <a16:creationId xmlns:a16="http://schemas.microsoft.com/office/drawing/2014/main" id="{B064B254-14E7-4879-9642-03C5441DE1DC}"/>
               </a:ext>
             </a:extLst>
           </p:cNvPr>
@@ -2922,7 +2922,7 @@
           <p:cNvPr id="11" name="">
             <a:extLst xmlns:a="http://schemas.openxmlformats.org/drawingml/2006/main">
               <a:ext uri="{FF2B5EF4-FFF2-40B4-BE49-F238E27FC236}">
-                <a16:creationId xmlns:a16="http://schemas.microsoft.com/office/drawing/2014/main" id="{78030CEB-B7DB-4A55-A05D-E0B0D22EC4CE}"/>
+                <a16:creationId xmlns:a16="http://schemas.microsoft.com/office/drawing/2014/main" id="{F65CAB9B-9177-4C34-8262-44FFD5CD6BCD}"/>
               </a:ext>
             </a:extLst>
           </p:cNvPr>
@@ -2979,7 +2979,7 @@
           <p:cNvPr id="12" name="">
             <a:extLst xmlns:a="http://schemas.openxmlformats.org/drawingml/2006/main">
               <a:ext uri="{FF2B5EF4-FFF2-40B4-BE49-F238E27FC236}">
-                <a16:creationId xmlns:a16="http://schemas.microsoft.com/office/drawing/2014/main" id="{FDEA5FD1-D856-49BA-B836-526C206461C8}"/>
+                <a16:creationId xmlns:a16="http://schemas.microsoft.com/office/drawing/2014/main" id="{9B324772-DD18-4B2C-93BC-45274620DD29}"/>
               </a:ext>
             </a:extLst>
           </p:cNvPr>
@@ -3036,7 +3036,7 @@
           <p:cNvPr id="13" name="">
             <a:extLst xmlns:a="http://schemas.openxmlformats.org/drawingml/2006/main">
               <a:ext uri="{FF2B5EF4-FFF2-40B4-BE49-F238E27FC236}">
-                <a16:creationId xmlns:a16="http://schemas.microsoft.com/office/drawing/2014/main" id="{AB220F23-6E69-49F1-88DD-EF8A491E2930}"/>
+                <a16:creationId xmlns:a16="http://schemas.microsoft.com/office/drawing/2014/main" id="{8E62CECE-0C6B-42ED-86FB-36F609BBC66E}"/>
               </a:ext>
             </a:extLst>
           </p:cNvPr>
@@ -3091,7 +3091,7 @@
     </p:spTree>
     <p:extLst>
       <p:ext uri="{BB962C8B-B14F-4D97-AF65-F5344CB8AC3E}">
-        <p14:creationId xmlns:p14="http://schemas.microsoft.com/office/powerpoint/2010/main" val="900223216"/>
+        <p14:creationId xmlns:p14="http://schemas.microsoft.com/office/powerpoint/2010/main" val="1790392954"/>
       </p:ext>
     </p:extLst>
   </p:cSld>
@@ -3292,7 +3292,7 @@
           <p:cNvPr id="19" name="">
             <a:extLst xmlns:a="http://schemas.openxmlformats.org/drawingml/2006/main">
               <a:ext uri="{FF2B5EF4-FFF2-40B4-BE49-F238E27FC236}">
-                <a16:creationId xmlns:a16="http://schemas.microsoft.com/office/drawing/2014/main" id="{959FD58E-B395-4EB1-9733-8F5C69081D2C}"/>
+                <a16:creationId xmlns:a16="http://schemas.microsoft.com/office/drawing/2014/main" id="{F65CBC29-7853-488D-B29A-3107D1512CAA}"/>
               </a:ext>
             </a:extLst>
           </p:cNvPr>
@@ -3324,7 +3324,7 @@
           <p:cNvPr id="2" name="">
             <a:extLst xmlns:a="http://schemas.openxmlformats.org/drawingml/2006/main">
               <a:ext uri="{FF2B5EF4-FFF2-40B4-BE49-F238E27FC236}">
-                <a16:creationId xmlns:a16="http://schemas.microsoft.com/office/drawing/2014/main" id="{9575662E-147B-426D-8A0F-5BFBA9FC9246}"/>
+                <a16:creationId xmlns:a16="http://schemas.microsoft.com/office/drawing/2014/main" id="{72085DA6-8D20-447E-84B7-A6BB8EDF0F2B}"/>
               </a:ext>
             </a:extLst>
           </p:cNvPr>
@@ -3381,7 +3381,7 @@
           <p:cNvPr id="3" name="">
             <a:extLst xmlns:a="http://schemas.openxmlformats.org/drawingml/2006/main">
               <a:ext uri="{FF2B5EF4-FFF2-40B4-BE49-F238E27FC236}">
-                <a16:creationId xmlns:a16="http://schemas.microsoft.com/office/drawing/2014/main" id="{F157CA67-291B-4796-994E-7251D2C93EF5}"/>
+                <a16:creationId xmlns:a16="http://schemas.microsoft.com/office/drawing/2014/main" id="{5723D75E-7BCB-401D-A449-72846003F4AF}"/>
               </a:ext>
             </a:extLst>
           </p:cNvPr>
@@ -3413,7 +3413,7 @@
           <p:cNvPr id="4" name="">
             <a:extLst xmlns:a="http://schemas.openxmlformats.org/drawingml/2006/main">
               <a:ext uri="{FF2B5EF4-FFF2-40B4-BE49-F238E27FC236}">
-                <a16:creationId xmlns:a16="http://schemas.microsoft.com/office/drawing/2014/main" id="{6DEFF360-48E1-4A69-87C0-B6EDC756583A}"/>
+                <a16:creationId xmlns:a16="http://schemas.microsoft.com/office/drawing/2014/main" id="{39CDA7C0-1EDF-4CE1-985E-A2CDFBF57220}"/>
               </a:ext>
             </a:extLst>
           </p:cNvPr>
@@ -3470,7 +3470,7 @@
           <p:cNvPr id="5" name="">
             <a:extLst xmlns:a="http://schemas.openxmlformats.org/drawingml/2006/main">
               <a:ext uri="{FF2B5EF4-FFF2-40B4-BE49-F238E27FC236}">
-                <a16:creationId xmlns:a16="http://schemas.microsoft.com/office/drawing/2014/main" id="{6CCC14A8-E112-435B-9BBC-D9B7BFEC315C}"/>
+                <a16:creationId xmlns:a16="http://schemas.microsoft.com/office/drawing/2014/main" id="{4DFC4D29-141D-433B-97CE-C780653405AD}"/>
               </a:ext>
             </a:extLst>
           </p:cNvPr>
@@ -3527,7 +3527,7 @@
           <p:cNvPr id="6" name="">
             <a:extLst xmlns:a="http://schemas.openxmlformats.org/drawingml/2006/main">
               <a:ext uri="{FF2B5EF4-FFF2-40B4-BE49-F238E27FC236}">
-                <a16:creationId xmlns:a16="http://schemas.microsoft.com/office/drawing/2014/main" id="{2EA2C4E1-DCF2-4094-AA4F-A1BB1F8D967E}"/>
+                <a16:creationId xmlns:a16="http://schemas.microsoft.com/office/drawing/2014/main" id="{BFFB6933-536F-498C-97E6-C5C0EEA74862}"/>
               </a:ext>
             </a:extLst>
           </p:cNvPr>
@@ -3584,7 +3584,7 @@
           <p:cNvPr id="7" name="">
             <a:extLst xmlns:a="http://schemas.openxmlformats.org/drawingml/2006/main">
               <a:ext uri="{FF2B5EF4-FFF2-40B4-BE49-F238E27FC236}">
-                <a16:creationId xmlns:a16="http://schemas.microsoft.com/office/drawing/2014/main" id="{9309A18E-707D-4DF2-8310-5AA707F1A857}"/>
+                <a16:creationId xmlns:a16="http://schemas.microsoft.com/office/drawing/2014/main" id="{AD5C5D6C-F0DE-497D-84AC-27BB5593F23E}"/>
               </a:ext>
             </a:extLst>
           </p:cNvPr>
@@ -3616,7 +3616,7 @@
           <p:cNvPr id="8" name="">
             <a:extLst xmlns:a="http://schemas.openxmlformats.org/drawingml/2006/main">
               <a:ext uri="{FF2B5EF4-FFF2-40B4-BE49-F238E27FC236}">
-                <a16:creationId xmlns:a16="http://schemas.microsoft.com/office/drawing/2014/main" id="{28912395-18EC-4B1C-9F23-A235ED128126}"/>
+                <a16:creationId xmlns:a16="http://schemas.microsoft.com/office/drawing/2014/main" id="{9FBCCB50-D297-413C-9EBB-4A52D4D3F000}"/>
               </a:ext>
             </a:extLst>
           </p:cNvPr>
@@ -3673,7 +3673,7 @@
           <p:cNvPr id="9" name="">
             <a:extLst xmlns:a="http://schemas.openxmlformats.org/drawingml/2006/main">
               <a:ext uri="{FF2B5EF4-FFF2-40B4-BE49-F238E27FC236}">
-                <a16:creationId xmlns:a16="http://schemas.microsoft.com/office/drawing/2014/main" id="{44332F04-295E-4E6B-BE15-476F129FA01D}"/>
+                <a16:creationId xmlns:a16="http://schemas.microsoft.com/office/drawing/2014/main" id="{F5E6F9DC-D7D6-4E39-93B1-99F0A36BBEA9}"/>
               </a:ext>
             </a:extLst>
           </p:cNvPr>
@@ -3730,7 +3730,7 @@
           <p:cNvPr id="10" name="">
             <a:extLst xmlns:a="http://schemas.openxmlformats.org/drawingml/2006/main">
               <a:ext uri="{FF2B5EF4-FFF2-40B4-BE49-F238E27FC236}">
-                <a16:creationId xmlns:a16="http://schemas.microsoft.com/office/drawing/2014/main" id="{A778DC02-207A-476A-B893-8FE3C4CF1486}"/>
+                <a16:creationId xmlns:a16="http://schemas.microsoft.com/office/drawing/2014/main" id="{C5DAB188-7949-4282-9391-D657B78F3453}"/>
               </a:ext>
             </a:extLst>
           </p:cNvPr>
@@ -3787,7 +3787,7 @@
           <p:cNvPr id="11" name="">
             <a:extLst xmlns:a="http://schemas.openxmlformats.org/drawingml/2006/main">
               <a:ext uri="{FF2B5EF4-FFF2-40B4-BE49-F238E27FC236}">
-                <a16:creationId xmlns:a16="http://schemas.microsoft.com/office/drawing/2014/main" id="{9CA37DFB-B244-43BF-B29C-D6AE22F2A732}"/>
+                <a16:creationId xmlns:a16="http://schemas.microsoft.com/office/drawing/2014/main" id="{0FA3BC0C-050E-48A7-B565-9C51B7EA1039}"/>
               </a:ext>
             </a:extLst>
           </p:cNvPr>
@@ -3821,7 +3821,7 @@
           <p:cNvPr id="12" name="">
             <a:extLst xmlns:a="http://schemas.openxmlformats.org/drawingml/2006/main">
               <a:ext uri="{FF2B5EF4-FFF2-40B4-BE49-F238E27FC236}">
-                <a16:creationId xmlns:a16="http://schemas.microsoft.com/office/drawing/2014/main" id="{11374768-1C97-4E3E-9CAF-0B27B661C08A}"/>
+                <a16:creationId xmlns:a16="http://schemas.microsoft.com/office/drawing/2014/main" id="{48DA96C0-0DC6-4BB5-BC71-17333B716CA5}"/>
               </a:ext>
             </a:extLst>
           </p:cNvPr>
@@ -3878,7 +3878,7 @@
           <p:cNvPr id="13" name="">
             <a:extLst xmlns:a="http://schemas.openxmlformats.org/drawingml/2006/main">
               <a:ext uri="{FF2B5EF4-FFF2-40B4-BE49-F238E27FC236}">
-                <a16:creationId xmlns:a16="http://schemas.microsoft.com/office/drawing/2014/main" id="{8B7393BD-1346-4C5E-89A6-DB8926101E42}"/>
+                <a16:creationId xmlns:a16="http://schemas.microsoft.com/office/drawing/2014/main" id="{7960E631-27A1-46DB-A9E9-6256BE838564}"/>
               </a:ext>
             </a:extLst>
           </p:cNvPr>
@@ -3935,7 +3935,7 @@
           <p:cNvPr id="14" name="">
             <a:extLst xmlns:a="http://schemas.openxmlformats.org/drawingml/2006/main">
               <a:ext uri="{FF2B5EF4-FFF2-40B4-BE49-F238E27FC236}">
-                <a16:creationId xmlns:a16="http://schemas.microsoft.com/office/drawing/2014/main" id="{3C2BC230-865B-4699-ACB2-0E691E011B5E}"/>
+                <a16:creationId xmlns:a16="http://schemas.microsoft.com/office/drawing/2014/main" id="{AC1D017C-FEFF-47C4-99E0-930ED1A89EF5}"/>
               </a:ext>
             </a:extLst>
           </p:cNvPr>
@@ -3992,7 +3992,7 @@
           <p:cNvPr id="15" name="">
             <a:extLst xmlns:a="http://schemas.openxmlformats.org/drawingml/2006/main">
               <a:ext uri="{FF2B5EF4-FFF2-40B4-BE49-F238E27FC236}">
-                <a16:creationId xmlns:a16="http://schemas.microsoft.com/office/drawing/2014/main" id="{15254C8B-AA60-40C7-BD7D-9FF54EBFEDA1}"/>
+                <a16:creationId xmlns:a16="http://schemas.microsoft.com/office/drawing/2014/main" id="{B7CB6C8B-3FFD-4FFB-875D-BAA76C64BB3C}"/>
               </a:ext>
             </a:extLst>
           </p:cNvPr>
@@ -4026,7 +4026,7 @@
           <p:cNvPr id="16" name="">
             <a:extLst xmlns:a="http://schemas.openxmlformats.org/drawingml/2006/main">
               <a:ext uri="{FF2B5EF4-FFF2-40B4-BE49-F238E27FC236}">
-                <a16:creationId xmlns:a16="http://schemas.microsoft.com/office/drawing/2014/main" id="{611BF641-10AE-4AAA-99ED-43701A535678}"/>
+                <a16:creationId xmlns:a16="http://schemas.microsoft.com/office/drawing/2014/main" id="{72029BD0-8FAD-486A-8A8E-F6871E4B865E}"/>
               </a:ext>
             </a:extLst>
           </p:cNvPr>
@@ -4083,7 +4083,7 @@
           <p:cNvPr id="17" name="">
             <a:extLst xmlns:a="http://schemas.openxmlformats.org/drawingml/2006/main">
               <a:ext uri="{FF2B5EF4-FFF2-40B4-BE49-F238E27FC236}">
-                <a16:creationId xmlns:a16="http://schemas.microsoft.com/office/drawing/2014/main" id="{FBC3BE2B-C228-4C24-B0C2-3A3CC2FFF22D}"/>
+                <a16:creationId xmlns:a16="http://schemas.microsoft.com/office/drawing/2014/main" id="{59FDAB7B-560D-4230-B8F3-D661A5FDFD10}"/>
               </a:ext>
             </a:extLst>
           </p:cNvPr>
@@ -4140,7 +4140,7 @@
           <p:cNvPr id="18" name="">
             <a:extLst xmlns:a="http://schemas.openxmlformats.org/drawingml/2006/main">
               <a:ext uri="{FF2B5EF4-FFF2-40B4-BE49-F238E27FC236}">
-                <a16:creationId xmlns:a16="http://schemas.microsoft.com/office/drawing/2014/main" id="{4D22845F-FB96-438C-B7E9-C98C26826339}"/>
+                <a16:creationId xmlns:a16="http://schemas.microsoft.com/office/drawing/2014/main" id="{7231FBFD-B0CF-4FC3-BEC4-24DDB806ADF7}"/>
               </a:ext>
             </a:extLst>
           </p:cNvPr>
@@ -4195,7 +4195,7 @@
     </p:spTree>
     <p:extLst>
       <p:ext uri="{BB962C8B-B14F-4D97-AF65-F5344CB8AC3E}">
-        <p14:creationId xmlns:p14="http://schemas.microsoft.com/office/powerpoint/2010/main" val="1822803158"/>
+        <p14:creationId xmlns:p14="http://schemas.microsoft.com/office/powerpoint/2010/main" val="861204458"/>
       </p:ext>
     </p:extLst>
   </p:cSld>
@@ -4350,7 +4350,7 @@
           <p:cNvPr id="23" name="">
             <a:extLst xmlns:a="http://schemas.openxmlformats.org/drawingml/2006/main">
               <a:ext uri="{FF2B5EF4-FFF2-40B4-BE49-F238E27FC236}">
-                <a16:creationId xmlns:a16="http://schemas.microsoft.com/office/drawing/2014/main" id="{20F552D0-9716-4CD6-A0C9-1655C1AC0D48}"/>
+                <a16:creationId xmlns:a16="http://schemas.microsoft.com/office/drawing/2014/main" id="{FFFA5361-3271-476C-A324-61E4ECECADFD}"/>
               </a:ext>
             </a:extLst>
           </p:cNvPr>
@@ -4382,7 +4382,7 @@
           <p:cNvPr id="2" name="">
             <a:extLst xmlns:a="http://schemas.openxmlformats.org/drawingml/2006/main">
               <a:ext uri="{FF2B5EF4-FFF2-40B4-BE49-F238E27FC236}">
-                <a16:creationId xmlns:a16="http://schemas.microsoft.com/office/drawing/2014/main" id="{BB3BFAF4-A493-4AAA-9CB6-C69842D9D93E}"/>
+                <a16:creationId xmlns:a16="http://schemas.microsoft.com/office/drawing/2014/main" id="{7C02DC71-0F05-4A54-BF1E-18846F7ABACF}"/>
               </a:ext>
             </a:extLst>
           </p:cNvPr>
@@ -4439,7 +4439,7 @@
           <p:cNvPr id="3" name="">
             <a:extLst xmlns:a="http://schemas.openxmlformats.org/drawingml/2006/main">
               <a:ext uri="{FF2B5EF4-FFF2-40B4-BE49-F238E27FC236}">
-                <a16:creationId xmlns:a16="http://schemas.microsoft.com/office/drawing/2014/main" id="{6AB7ECE7-E6D2-4E84-969A-BE8401B07591}"/>
+                <a16:creationId xmlns:a16="http://schemas.microsoft.com/office/drawing/2014/main" id="{9170AD1C-8EC0-481A-A53C-A45134B0FCBD}"/>
               </a:ext>
             </a:extLst>
           </p:cNvPr>
@@ -4471,7 +4471,7 @@
           <p:cNvPr id="4" name="">
             <a:extLst xmlns:a="http://schemas.openxmlformats.org/drawingml/2006/main">
               <a:ext uri="{FF2B5EF4-FFF2-40B4-BE49-F238E27FC236}">
-                <a16:creationId xmlns:a16="http://schemas.microsoft.com/office/drawing/2014/main" id="{607E8B97-E124-4CA5-AFCD-8075C0E0C128}"/>
+                <a16:creationId xmlns:a16="http://schemas.microsoft.com/office/drawing/2014/main" id="{72898BC4-D13A-4C0E-B3BD-A087BAD513DA}"/>
               </a:ext>
             </a:extLst>
           </p:cNvPr>
@@ -4528,7 +4528,7 @@
           <p:cNvPr id="5" name="">
             <a:extLst xmlns:a="http://schemas.openxmlformats.org/drawingml/2006/main">
               <a:ext uri="{FF2B5EF4-FFF2-40B4-BE49-F238E27FC236}">
-                <a16:creationId xmlns:a16="http://schemas.microsoft.com/office/drawing/2014/main" id="{F9953105-B019-446C-8C2E-42F18BA6EB96}"/>
+                <a16:creationId xmlns:a16="http://schemas.microsoft.com/office/drawing/2014/main" id="{0B4FEEA4-3D8C-4340-8C4E-5021990CC88A}"/>
               </a:ext>
             </a:extLst>
           </p:cNvPr>
@@ -4585,7 +4585,7 @@
           <p:cNvPr id="6" name="">
             <a:extLst xmlns:a="http://schemas.openxmlformats.org/drawingml/2006/main">
               <a:ext uri="{FF2B5EF4-FFF2-40B4-BE49-F238E27FC236}">
-                <a16:creationId xmlns:a16="http://schemas.microsoft.com/office/drawing/2014/main" id="{06A876DF-F506-4F73-B371-DC86ACB5CD00}"/>
+                <a16:creationId xmlns:a16="http://schemas.microsoft.com/office/drawing/2014/main" id="{B5535C67-DE4A-4D65-AD18-7BB9A76E473E}"/>
               </a:ext>
             </a:extLst>
           </p:cNvPr>
@@ -4642,7 +4642,7 @@
           <p:cNvPr id="7" name="">
             <a:extLst xmlns:a="http://schemas.openxmlformats.org/drawingml/2006/main">
               <a:ext uri="{FF2B5EF4-FFF2-40B4-BE49-F238E27FC236}">
-                <a16:creationId xmlns:a16="http://schemas.microsoft.com/office/drawing/2014/main" id="{75D0DF9E-5921-4133-B4AE-320E239033CF}"/>
+                <a16:creationId xmlns:a16="http://schemas.microsoft.com/office/drawing/2014/main" id="{6949525E-CB9D-44E5-982A-0BC76D3A87F8}"/>
               </a:ext>
             </a:extLst>
           </p:cNvPr>
@@ -4674,7 +4674,7 @@
           <p:cNvPr id="8" name="">
             <a:extLst xmlns:a="http://schemas.openxmlformats.org/drawingml/2006/main">
               <a:ext uri="{FF2B5EF4-FFF2-40B4-BE49-F238E27FC236}">
-                <a16:creationId xmlns:a16="http://schemas.microsoft.com/office/drawing/2014/main" id="{A658B265-1DBA-4897-99C4-9E4E923BE44E}"/>
+                <a16:creationId xmlns:a16="http://schemas.microsoft.com/office/drawing/2014/main" id="{F9A4E4F3-6A7D-4D34-97B7-561C88FEF7B6}"/>
               </a:ext>
             </a:extLst>
           </p:cNvPr>
@@ -4731,7 +4731,7 @@
           <p:cNvPr id="9" name="">
             <a:extLst xmlns:a="http://schemas.openxmlformats.org/drawingml/2006/main">
               <a:ext uri="{FF2B5EF4-FFF2-40B4-BE49-F238E27FC236}">
-                <a16:creationId xmlns:a16="http://schemas.microsoft.com/office/drawing/2014/main" id="{4BAB45F8-B658-4DAD-B986-36482FB159AD}"/>
+                <a16:creationId xmlns:a16="http://schemas.microsoft.com/office/drawing/2014/main" id="{5ED0C280-BC7F-4B23-A013-ABD92865CECA}"/>
               </a:ext>
             </a:extLst>
           </p:cNvPr>
@@ -4788,7 +4788,7 @@
           <p:cNvPr id="10" name="">
             <a:extLst xmlns:a="http://schemas.openxmlformats.org/drawingml/2006/main">
               <a:ext uri="{FF2B5EF4-FFF2-40B4-BE49-F238E27FC236}">
-                <a16:creationId xmlns:a16="http://schemas.microsoft.com/office/drawing/2014/main" id="{61C81580-FA58-4F54-A19A-A7440C7CDBD3}"/>
+                <a16:creationId xmlns:a16="http://schemas.microsoft.com/office/drawing/2014/main" id="{5ADF8897-4392-4FE2-BC6A-D84E4C9BC0CF}"/>
               </a:ext>
             </a:extLst>
           </p:cNvPr>
@@ -4822,7 +4822,7 @@
           <p:cNvPr id="11" name="">
             <a:extLst xmlns:a="http://schemas.openxmlformats.org/drawingml/2006/main">
               <a:ext uri="{FF2B5EF4-FFF2-40B4-BE49-F238E27FC236}">
-                <a16:creationId xmlns:a16="http://schemas.microsoft.com/office/drawing/2014/main" id="{3300480A-63FF-4B08-85C9-A05A5DC1944F}"/>
+                <a16:creationId xmlns:a16="http://schemas.microsoft.com/office/drawing/2014/main" id="{EA7222AA-9D3E-45E3-9A35-C6797BBDA1AB}"/>
               </a:ext>
             </a:extLst>
           </p:cNvPr>
@@ -4854,7 +4854,7 @@
           <p:cNvPr id="12" name="">
             <a:extLst xmlns:a="http://schemas.openxmlformats.org/drawingml/2006/main">
               <a:ext uri="{FF2B5EF4-FFF2-40B4-BE49-F238E27FC236}">
-                <a16:creationId xmlns:a16="http://schemas.microsoft.com/office/drawing/2014/main" id="{AEAA9060-377E-4DC1-97A8-53FD174B53F7}"/>
+                <a16:creationId xmlns:a16="http://schemas.microsoft.com/office/drawing/2014/main" id="{69D25C2A-8A4C-4FBB-9E4F-74B288820FC6}"/>
               </a:ext>
             </a:extLst>
           </p:cNvPr>
@@ -4911,7 +4911,7 @@
           <p:cNvPr id="13" name="">
             <a:extLst xmlns:a="http://schemas.openxmlformats.org/drawingml/2006/main">
               <a:ext uri="{FF2B5EF4-FFF2-40B4-BE49-F238E27FC236}">
-                <a16:creationId xmlns:a16="http://schemas.microsoft.com/office/drawing/2014/main" id="{2E135334-65F9-41D1-A524-D5CFD409A5A2}"/>
+                <a16:creationId xmlns:a16="http://schemas.microsoft.com/office/drawing/2014/main" id="{264B4D53-1DA6-4028-817D-88866A7104FE}"/>
               </a:ext>
             </a:extLst>
           </p:cNvPr>
@@ -4968,7 +4968,7 @@
           <p:cNvPr id="14" name="">
             <a:extLst xmlns:a="http://schemas.openxmlformats.org/drawingml/2006/main">
               <a:ext uri="{FF2B5EF4-FFF2-40B4-BE49-F238E27FC236}">
-                <a16:creationId xmlns:a16="http://schemas.microsoft.com/office/drawing/2014/main" id="{BF62F18A-4DC5-42B6-8606-7171EC4932E9}"/>
+                <a16:creationId xmlns:a16="http://schemas.microsoft.com/office/drawing/2014/main" id="{26436E2C-C8B2-4A51-ADD1-A55CB86ECBBF}"/>
               </a:ext>
             </a:extLst>
           </p:cNvPr>
@@ -5002,7 +5002,7 @@
           <p:cNvPr id="15" name="">
             <a:extLst xmlns:a="http://schemas.openxmlformats.org/drawingml/2006/main">
               <a:ext uri="{FF2B5EF4-FFF2-40B4-BE49-F238E27FC236}">
-                <a16:creationId xmlns:a16="http://schemas.microsoft.com/office/drawing/2014/main" id="{BE69C2FE-DB1F-45F9-8F54-2879B478E873}"/>
+                <a16:creationId xmlns:a16="http://schemas.microsoft.com/office/drawing/2014/main" id="{785BAB77-D482-4146-B30C-16ECF899B319}"/>
               </a:ext>
             </a:extLst>
           </p:cNvPr>
@@ -5034,7 +5034,7 @@
           <p:cNvPr id="16" name="">
             <a:extLst xmlns:a="http://schemas.openxmlformats.org/drawingml/2006/main">
               <a:ext uri="{FF2B5EF4-FFF2-40B4-BE49-F238E27FC236}">
-                <a16:creationId xmlns:a16="http://schemas.microsoft.com/office/drawing/2014/main" id="{FAB3C341-60EE-4A54-8619-656D65625AB5}"/>
+                <a16:creationId xmlns:a16="http://schemas.microsoft.com/office/drawing/2014/main" id="{3BE89DC3-A43A-476F-B977-7910E560AD00}"/>
               </a:ext>
             </a:extLst>
           </p:cNvPr>
@@ -5091,7 +5091,7 @@
           <p:cNvPr id="17" name="">
             <a:extLst xmlns:a="http://schemas.openxmlformats.org/drawingml/2006/main">
               <a:ext uri="{FF2B5EF4-FFF2-40B4-BE49-F238E27FC236}">
-                <a16:creationId xmlns:a16="http://schemas.microsoft.com/office/drawing/2014/main" id="{083177CA-B6A2-459E-89FD-434F18DCA5A0}"/>
+                <a16:creationId xmlns:a16="http://schemas.microsoft.com/office/drawing/2014/main" id="{BDBFF033-71D2-488A-AEEA-01C492A27DB0}"/>
               </a:ext>
             </a:extLst>
           </p:cNvPr>
@@ -5148,7 +5148,7 @@
           <p:cNvPr id="18" name="">
             <a:extLst xmlns:a="http://schemas.openxmlformats.org/drawingml/2006/main">
               <a:ext uri="{FF2B5EF4-FFF2-40B4-BE49-F238E27FC236}">
-                <a16:creationId xmlns:a16="http://schemas.microsoft.com/office/drawing/2014/main" id="{F8E98B8F-8E27-4E85-8B50-16FDD8571689}"/>
+                <a16:creationId xmlns:a16="http://schemas.microsoft.com/office/drawing/2014/main" id="{209D99E5-567A-4FAC-B22A-56C6FD3E6E4A}"/>
               </a:ext>
             </a:extLst>
           </p:cNvPr>
@@ -5182,7 +5182,7 @@
           <p:cNvPr id="19" name="">
             <a:extLst xmlns:a="http://schemas.openxmlformats.org/drawingml/2006/main">
               <a:ext uri="{FF2B5EF4-FFF2-40B4-BE49-F238E27FC236}">
-                <a16:creationId xmlns:a16="http://schemas.microsoft.com/office/drawing/2014/main" id="{E46DEC48-6BFB-4172-903C-525ED25A5A83}"/>
+                <a16:creationId xmlns:a16="http://schemas.microsoft.com/office/drawing/2014/main" id="{0C3FAE2E-677A-4D92-8182-161899D706BD}"/>
               </a:ext>
             </a:extLst>
           </p:cNvPr>
@@ -5214,7 +5214,7 @@
           <p:cNvPr id="20" name="">
             <a:extLst xmlns:a="http://schemas.openxmlformats.org/drawingml/2006/main">
               <a:ext uri="{FF2B5EF4-FFF2-40B4-BE49-F238E27FC236}">
-                <a16:creationId xmlns:a16="http://schemas.microsoft.com/office/drawing/2014/main" id="{45DF9C07-1174-4F8B-8342-FCB40C47109D}"/>
+                <a16:creationId xmlns:a16="http://schemas.microsoft.com/office/drawing/2014/main" id="{0B923BB1-2B1A-4632-ACC4-384B45F06D14}"/>
               </a:ext>
             </a:extLst>
           </p:cNvPr>
@@ -5271,7 +5271,7 @@
           <p:cNvPr id="21" name="">
             <a:extLst xmlns:a="http://schemas.openxmlformats.org/drawingml/2006/main">
               <a:ext uri="{FF2B5EF4-FFF2-40B4-BE49-F238E27FC236}">
-                <a16:creationId xmlns:a16="http://schemas.microsoft.com/office/drawing/2014/main" id="{85508A2A-43DF-44AD-B654-51EEC4B74E13}"/>
+                <a16:creationId xmlns:a16="http://schemas.microsoft.com/office/drawing/2014/main" id="{C1885CF1-6BF8-4012-B564-97398FC4C355}"/>
               </a:ext>
             </a:extLst>
           </p:cNvPr>
@@ -5328,7 +5328,7 @@
           <p:cNvPr id="22" name="">
             <a:extLst xmlns:a="http://schemas.openxmlformats.org/drawingml/2006/main">
               <a:ext uri="{FF2B5EF4-FFF2-40B4-BE49-F238E27FC236}">
-                <a16:creationId xmlns:a16="http://schemas.microsoft.com/office/drawing/2014/main" id="{D697509B-FE5A-460F-8E1E-5591DBC53E1B}"/>
+                <a16:creationId xmlns:a16="http://schemas.microsoft.com/office/drawing/2014/main" id="{BEE338D5-AA3F-4639-8C67-E5305588CA63}"/>
               </a:ext>
             </a:extLst>
           </p:cNvPr>
@@ -5383,7 +5383,7 @@
     </p:spTree>
     <p:extLst>
       <p:ext uri="{BB962C8B-B14F-4D97-AF65-F5344CB8AC3E}">
-        <p14:creationId xmlns:p14="http://schemas.microsoft.com/office/powerpoint/2010/main" val="1485530370"/>
+        <p14:creationId xmlns:p14="http://schemas.microsoft.com/office/powerpoint/2010/main" val="381291678"/>
       </p:ext>
     </p:extLst>
   </p:cSld>
@@ -5584,7 +5584,7 @@
           <p:cNvPr id="23" name="">
             <a:extLst xmlns:a="http://schemas.openxmlformats.org/drawingml/2006/main">
               <a:ext uri="{FF2B5EF4-FFF2-40B4-BE49-F238E27FC236}">
-                <a16:creationId xmlns:a16="http://schemas.microsoft.com/office/drawing/2014/main" id="{CC579BCC-F14A-4749-8704-13B466B3EE36}"/>
+                <a16:creationId xmlns:a16="http://schemas.microsoft.com/office/drawing/2014/main" id="{231DC5D1-078F-4591-9E53-AD9EA3024E17}"/>
               </a:ext>
             </a:extLst>
           </p:cNvPr>
@@ -5616,7 +5616,7 @@
           <p:cNvPr id="2" name="">
             <a:extLst xmlns:a="http://schemas.openxmlformats.org/drawingml/2006/main">
               <a:ext uri="{FF2B5EF4-FFF2-40B4-BE49-F238E27FC236}">
-                <a16:creationId xmlns:a16="http://schemas.microsoft.com/office/drawing/2014/main" id="{D1DB81AC-63E4-4FDA-9A27-8B3DA4EDA3AC}"/>
+                <a16:creationId xmlns:a16="http://schemas.microsoft.com/office/drawing/2014/main" id="{C767D066-49E8-41FE-9D2A-25240AD9A080}"/>
               </a:ext>
             </a:extLst>
           </p:cNvPr>
@@ -5673,7 +5673,7 @@
           <p:cNvPr id="3" name="">
             <a:extLst xmlns:a="http://schemas.openxmlformats.org/drawingml/2006/main">
               <a:ext uri="{FF2B5EF4-FFF2-40B4-BE49-F238E27FC236}">
-                <a16:creationId xmlns:a16="http://schemas.microsoft.com/office/drawing/2014/main" id="{BD16BD9A-B4F4-432E-B8CB-34EF016A0A69}"/>
+                <a16:creationId xmlns:a16="http://schemas.microsoft.com/office/drawing/2014/main" id="{53C85CE3-F44C-4AF0-A9B3-FECE841BF2D6}"/>
               </a:ext>
             </a:extLst>
           </p:cNvPr>
@@ -5705,7 +5705,7 @@
           <p:cNvPr id="4" name="">
             <a:extLst xmlns:a="http://schemas.openxmlformats.org/drawingml/2006/main">
               <a:ext uri="{FF2B5EF4-FFF2-40B4-BE49-F238E27FC236}">
-                <a16:creationId xmlns:a16="http://schemas.microsoft.com/office/drawing/2014/main" id="{03D9FE6C-FEEA-4B13-83B9-716A41325F35}"/>
+                <a16:creationId xmlns:a16="http://schemas.microsoft.com/office/drawing/2014/main" id="{3C95035C-D391-4FA9-A2A4-64BEAE91F8A0}"/>
               </a:ext>
             </a:extLst>
           </p:cNvPr>
@@ -5762,7 +5762,7 @@
           <p:cNvPr id="5" name="">
             <a:extLst xmlns:a="http://schemas.openxmlformats.org/drawingml/2006/main">
               <a:ext uri="{FF2B5EF4-FFF2-40B4-BE49-F238E27FC236}">
-                <a16:creationId xmlns:a16="http://schemas.microsoft.com/office/drawing/2014/main" id="{EF989BCE-2B82-4B96-AE74-AB4CAD0D3218}"/>
+                <a16:creationId xmlns:a16="http://schemas.microsoft.com/office/drawing/2014/main" id="{0A3C7F3E-766F-47D7-A932-5AB4C180B168}"/>
               </a:ext>
             </a:extLst>
           </p:cNvPr>
@@ -5819,7 +5819,7 @@
           <p:cNvPr id="6" name="">
             <a:extLst xmlns:a="http://schemas.openxmlformats.org/drawingml/2006/main">
               <a:ext uri="{FF2B5EF4-FFF2-40B4-BE49-F238E27FC236}">
-                <a16:creationId xmlns:a16="http://schemas.microsoft.com/office/drawing/2014/main" id="{B1793E61-FEFC-4B29-8A99-03D246AA97B1}"/>
+                <a16:creationId xmlns:a16="http://schemas.microsoft.com/office/drawing/2014/main" id="{CC4CA967-9682-4127-993B-92F176D1F23F}"/>
               </a:ext>
             </a:extLst>
           </p:cNvPr>
@@ -5876,7 +5876,7 @@
           <p:cNvPr id="7" name="">
             <a:extLst xmlns:a="http://schemas.openxmlformats.org/drawingml/2006/main">
               <a:ext uri="{FF2B5EF4-FFF2-40B4-BE49-F238E27FC236}">
-                <a16:creationId xmlns:a16="http://schemas.microsoft.com/office/drawing/2014/main" id="{28D9766C-C797-41CA-AAE1-4FBAF7348CEF}"/>
+                <a16:creationId xmlns:a16="http://schemas.microsoft.com/office/drawing/2014/main" id="{90648AAF-BDA7-484F-9206-375CAC6CFABD}"/>
               </a:ext>
             </a:extLst>
           </p:cNvPr>
@@ -5908,7 +5908,7 @@
           <p:cNvPr id="8" name="">
             <a:extLst xmlns:a="http://schemas.openxmlformats.org/drawingml/2006/main">
               <a:ext uri="{FF2B5EF4-FFF2-40B4-BE49-F238E27FC236}">
-                <a16:creationId xmlns:a16="http://schemas.microsoft.com/office/drawing/2014/main" id="{655D9AD4-9E0F-409B-9F1A-1D068CE8100F}"/>
+                <a16:creationId xmlns:a16="http://schemas.microsoft.com/office/drawing/2014/main" id="{6CFB31C6-4B0E-4CA5-B4AD-80BAA767E771}"/>
               </a:ext>
             </a:extLst>
           </p:cNvPr>
@@ -5965,7 +5965,7 @@
           <p:cNvPr id="9" name="">
             <a:extLst xmlns:a="http://schemas.openxmlformats.org/drawingml/2006/main">
               <a:ext uri="{FF2B5EF4-FFF2-40B4-BE49-F238E27FC236}">
-                <a16:creationId xmlns:a16="http://schemas.microsoft.com/office/drawing/2014/main" id="{6D0BF4B9-4A32-44D1-881D-93D567737A6D}"/>
+                <a16:creationId xmlns:a16="http://schemas.microsoft.com/office/drawing/2014/main" id="{575DBBF9-83B1-47FF-8043-96E231083B9B}"/>
               </a:ext>
             </a:extLst>
           </p:cNvPr>
@@ -6022,7 +6022,7 @@
           <p:cNvPr id="10" name="">
             <a:extLst xmlns:a="http://schemas.openxmlformats.org/drawingml/2006/main">
               <a:ext uri="{FF2B5EF4-FFF2-40B4-BE49-F238E27FC236}">
-                <a16:creationId xmlns:a16="http://schemas.microsoft.com/office/drawing/2014/main" id="{C14C4C68-F604-4711-AC96-08DB0D58DB69}"/>
+                <a16:creationId xmlns:a16="http://schemas.microsoft.com/office/drawing/2014/main" id="{2553120D-B4D2-4FD6-8BCF-7B716053972C}"/>
               </a:ext>
             </a:extLst>
           </p:cNvPr>
@@ -6056,7 +6056,7 @@
           <p:cNvPr id="11" name="">
             <a:extLst xmlns:a="http://schemas.openxmlformats.org/drawingml/2006/main">
               <a:ext uri="{FF2B5EF4-FFF2-40B4-BE49-F238E27FC236}">
-                <a16:creationId xmlns:a16="http://schemas.microsoft.com/office/drawing/2014/main" id="{6A61C3F2-AE33-470B-AC95-F61B39FAC467}"/>
+                <a16:creationId xmlns:a16="http://schemas.microsoft.com/office/drawing/2014/main" id="{97BFFF75-8EE3-49AA-9930-EF80C1454078}"/>
               </a:ext>
             </a:extLst>
           </p:cNvPr>
@@ -6088,7 +6088,7 @@
           <p:cNvPr id="12" name="">
             <a:extLst xmlns:a="http://schemas.openxmlformats.org/drawingml/2006/main">
               <a:ext uri="{FF2B5EF4-FFF2-40B4-BE49-F238E27FC236}">
-                <a16:creationId xmlns:a16="http://schemas.microsoft.com/office/drawing/2014/main" id="{0E943F2A-58F1-468A-A37A-8993A126BE3A}"/>
+                <a16:creationId xmlns:a16="http://schemas.microsoft.com/office/drawing/2014/main" id="{4EAEDEA0-A52A-4825-A11D-FFFC9F83C237}"/>
               </a:ext>
             </a:extLst>
           </p:cNvPr>
@@ -6145,7 +6145,7 @@
           <p:cNvPr id="13" name="">
             <a:extLst xmlns:a="http://schemas.openxmlformats.org/drawingml/2006/main">
               <a:ext uri="{FF2B5EF4-FFF2-40B4-BE49-F238E27FC236}">
-                <a16:creationId xmlns:a16="http://schemas.microsoft.com/office/drawing/2014/main" id="{2CC2A452-959E-49EC-B07B-D2E5772452FD}"/>
+                <a16:creationId xmlns:a16="http://schemas.microsoft.com/office/drawing/2014/main" id="{EA1F9435-214D-46A1-BDA4-64C5DC70E2B2}"/>
               </a:ext>
             </a:extLst>
           </p:cNvPr>
@@ -6202,7 +6202,7 @@
           <p:cNvPr id="14" name="">
             <a:extLst xmlns:a="http://schemas.openxmlformats.org/drawingml/2006/main">
               <a:ext uri="{FF2B5EF4-FFF2-40B4-BE49-F238E27FC236}">
-                <a16:creationId xmlns:a16="http://schemas.microsoft.com/office/drawing/2014/main" id="{5908A056-9652-4BAB-A76C-A7652E285F59}"/>
+                <a16:creationId xmlns:a16="http://schemas.microsoft.com/office/drawing/2014/main" id="{79CB4A89-5AA4-4DE4-9792-4F382CEFDB37}"/>
               </a:ext>
             </a:extLst>
           </p:cNvPr>
@@ -6236,7 +6236,7 @@
           <p:cNvPr id="15" name="">
             <a:extLst xmlns:a="http://schemas.openxmlformats.org/drawingml/2006/main">
               <a:ext uri="{FF2B5EF4-FFF2-40B4-BE49-F238E27FC236}">
-                <a16:creationId xmlns:a16="http://schemas.microsoft.com/office/drawing/2014/main" id="{7F1387E6-F958-4E86-A2BE-AF6A2501D280}"/>
+                <a16:creationId xmlns:a16="http://schemas.microsoft.com/office/drawing/2014/main" id="{6C3FB994-9BDD-446F-90E5-F6F4B93F8E50}"/>
               </a:ext>
             </a:extLst>
           </p:cNvPr>
@@ -6268,7 +6268,7 @@
           <p:cNvPr id="16" name="">
             <a:extLst xmlns:a="http://schemas.openxmlformats.org/drawingml/2006/main">
               <a:ext uri="{FF2B5EF4-FFF2-40B4-BE49-F238E27FC236}">
-                <a16:creationId xmlns:a16="http://schemas.microsoft.com/office/drawing/2014/main" id="{DB85E8B0-8B35-45AE-9603-22769EB1D5EA}"/>
+                <a16:creationId xmlns:a16="http://schemas.microsoft.com/office/drawing/2014/main" id="{64085FB2-7278-4555-A62E-AC0B1C693DEB}"/>
               </a:ext>
             </a:extLst>
           </p:cNvPr>
@@ -6325,7 +6325,7 @@
           <p:cNvPr id="17" name="">
             <a:extLst xmlns:a="http://schemas.openxmlformats.org/drawingml/2006/main">
               <a:ext uri="{FF2B5EF4-FFF2-40B4-BE49-F238E27FC236}">
-                <a16:creationId xmlns:a16="http://schemas.microsoft.com/office/drawing/2014/main" id="{965B60BA-B194-498B-B030-3FF5E183221D}"/>
+                <a16:creationId xmlns:a16="http://schemas.microsoft.com/office/drawing/2014/main" id="{B8043C9F-26CC-4B02-8187-AEE08177F895}"/>
               </a:ext>
             </a:extLst>
           </p:cNvPr>
@@ -6382,7 +6382,7 @@
           <p:cNvPr id="18" name="">
             <a:extLst xmlns:a="http://schemas.openxmlformats.org/drawingml/2006/main">
               <a:ext uri="{FF2B5EF4-FFF2-40B4-BE49-F238E27FC236}">
-                <a16:creationId xmlns:a16="http://schemas.microsoft.com/office/drawing/2014/main" id="{19EEA999-B5E3-4CA8-B50D-09D704DFB630}"/>
+                <a16:creationId xmlns:a16="http://schemas.microsoft.com/office/drawing/2014/main" id="{156943FC-0D12-41B9-86BF-CB1565776CF9}"/>
               </a:ext>
             </a:extLst>
           </p:cNvPr>
@@ -6416,7 +6416,7 @@
           <p:cNvPr id="19" name="">
             <a:extLst xmlns:a="http://schemas.openxmlformats.org/drawingml/2006/main">
               <a:ext uri="{FF2B5EF4-FFF2-40B4-BE49-F238E27FC236}">
-                <a16:creationId xmlns:a16="http://schemas.microsoft.com/office/drawing/2014/main" id="{E5232743-5E2E-4D27-A5EE-1CF078F96EF3}"/>
+                <a16:creationId xmlns:a16="http://schemas.microsoft.com/office/drawing/2014/main" id="{B82D698E-0273-48F4-91FA-2FE8C17D0B37}"/>
               </a:ext>
             </a:extLst>
           </p:cNvPr>
@@ -6448,7 +6448,7 @@
           <p:cNvPr id="20" name="">
             <a:extLst xmlns:a="http://schemas.openxmlformats.org/drawingml/2006/main">
               <a:ext uri="{FF2B5EF4-FFF2-40B4-BE49-F238E27FC236}">
-                <a16:creationId xmlns:a16="http://schemas.microsoft.com/office/drawing/2014/main" id="{81072DD8-2025-4FC2-A4A0-03D82E5D1F68}"/>
+                <a16:creationId xmlns:a16="http://schemas.microsoft.com/office/drawing/2014/main" id="{70E3C86A-8662-4EB9-9557-826926AFC1CA}"/>
               </a:ext>
             </a:extLst>
           </p:cNvPr>
@@ -6505,7 +6505,7 @@
           <p:cNvPr id="21" name="">
             <a:extLst xmlns:a="http://schemas.openxmlformats.org/drawingml/2006/main">
               <a:ext uri="{FF2B5EF4-FFF2-40B4-BE49-F238E27FC236}">
-                <a16:creationId xmlns:a16="http://schemas.microsoft.com/office/drawing/2014/main" id="{397E2E54-497E-4CC3-8F19-72F3434E43D1}"/>
+                <a16:creationId xmlns:a16="http://schemas.microsoft.com/office/drawing/2014/main" id="{1EB22737-6E97-4F83-ABD4-C76834052C5F}"/>
               </a:ext>
             </a:extLst>
           </p:cNvPr>
@@ -6562,7 +6562,7 @@
           <p:cNvPr id="22" name="">
             <a:extLst xmlns:a="http://schemas.openxmlformats.org/drawingml/2006/main">
               <a:ext uri="{FF2B5EF4-FFF2-40B4-BE49-F238E27FC236}">
-                <a16:creationId xmlns:a16="http://schemas.microsoft.com/office/drawing/2014/main" id="{ECE69829-049B-4B3D-A5E9-55E5FE2393FA}"/>
+                <a16:creationId xmlns:a16="http://schemas.microsoft.com/office/drawing/2014/main" id="{636D8100-6C4C-48C9-937C-D74CC1C84C4A}"/>
               </a:ext>
             </a:extLst>
           </p:cNvPr>
@@ -6617,7 +6617,7 @@
     </p:spTree>
     <p:extLst>
       <p:ext uri="{BB962C8B-B14F-4D97-AF65-F5344CB8AC3E}">
-        <p14:creationId xmlns:p14="http://schemas.microsoft.com/office/powerpoint/2010/main" val="998599052"/>
+        <p14:creationId xmlns:p14="http://schemas.microsoft.com/office/powerpoint/2010/main" val="466709651"/>
       </p:ext>
     </p:extLst>
   </p:cSld>
@@ -6818,7 +6818,7 @@
           <p:cNvPr id="16" name="">
             <a:extLst xmlns:a="http://schemas.openxmlformats.org/drawingml/2006/main">
               <a:ext uri="{FF2B5EF4-FFF2-40B4-BE49-F238E27FC236}">
-                <a16:creationId xmlns:a16="http://schemas.microsoft.com/office/drawing/2014/main" id="{EEB9A7AA-980A-4593-82BC-7D1EBAA4A834}"/>
+                <a16:creationId xmlns:a16="http://schemas.microsoft.com/office/drawing/2014/main" id="{4DB4DC7B-23E7-4E35-AFF1-B38550B887A1}"/>
               </a:ext>
             </a:extLst>
           </p:cNvPr>
@@ -6850,7 +6850,7 @@
           <p:cNvPr id="2" name="">
             <a:extLst xmlns:a="http://schemas.openxmlformats.org/drawingml/2006/main">
               <a:ext uri="{FF2B5EF4-FFF2-40B4-BE49-F238E27FC236}">
-                <a16:creationId xmlns:a16="http://schemas.microsoft.com/office/drawing/2014/main" id="{4B1CF2D6-5094-438C-BF0D-21882301F7F1}"/>
+                <a16:creationId xmlns:a16="http://schemas.microsoft.com/office/drawing/2014/main" id="{ADC0B4E1-22D9-4F08-B7C9-B9CDA8096F32}"/>
               </a:ext>
             </a:extLst>
           </p:cNvPr>
@@ -6907,7 +6907,7 @@
           <p:cNvPr id="3" name="">
             <a:extLst xmlns:a="http://schemas.openxmlformats.org/drawingml/2006/main">
               <a:ext uri="{FF2B5EF4-FFF2-40B4-BE49-F238E27FC236}">
-                <a16:creationId xmlns:a16="http://schemas.microsoft.com/office/drawing/2014/main" id="{3DDFB0F6-2BCD-4D65-B6E5-E73E7AA654C3}"/>
+                <a16:creationId xmlns:a16="http://schemas.microsoft.com/office/drawing/2014/main" id="{95CB0D9F-2898-4BB8-9917-52D8FC76BC7F}"/>
               </a:ext>
             </a:extLst>
           </p:cNvPr>
@@ -6939,7 +6939,7 @@
           <p:cNvPr id="4" name="">
             <a:extLst xmlns:a="http://schemas.openxmlformats.org/drawingml/2006/main">
               <a:ext uri="{FF2B5EF4-FFF2-40B4-BE49-F238E27FC236}">
-                <a16:creationId xmlns:a16="http://schemas.microsoft.com/office/drawing/2014/main" id="{A97326CE-48D1-4D66-BCE9-13701B792066}"/>
+                <a16:creationId xmlns:a16="http://schemas.microsoft.com/office/drawing/2014/main" id="{D64D4629-0487-4A79-8C70-728686715F9C}"/>
               </a:ext>
             </a:extLst>
           </p:cNvPr>
@@ -6996,7 +6996,7 @@
           <p:cNvPr id="5" name="">
             <a:extLst xmlns:a="http://schemas.openxmlformats.org/drawingml/2006/main">
               <a:ext uri="{FF2B5EF4-FFF2-40B4-BE49-F238E27FC236}">
-                <a16:creationId xmlns:a16="http://schemas.microsoft.com/office/drawing/2014/main" id="{05078447-AADF-4A79-8147-8D8FE6F31F1D}"/>
+                <a16:creationId xmlns:a16="http://schemas.microsoft.com/office/drawing/2014/main" id="{6C7AA7D2-4DDA-469E-B1DF-542DF220D9E2}"/>
               </a:ext>
             </a:extLst>
           </p:cNvPr>
@@ -7053,7 +7053,7 @@
           <p:cNvPr id="6" name="">
             <a:extLst xmlns:a="http://schemas.openxmlformats.org/drawingml/2006/main">
               <a:ext uri="{FF2B5EF4-FFF2-40B4-BE49-F238E27FC236}">
-                <a16:creationId xmlns:a16="http://schemas.microsoft.com/office/drawing/2014/main" id="{1ACFAB55-34CF-48EC-9238-50B35D425214}"/>
+                <a16:creationId xmlns:a16="http://schemas.microsoft.com/office/drawing/2014/main" id="{013677BC-5D81-41DD-8302-76E72BB9581A}"/>
               </a:ext>
             </a:extLst>
           </p:cNvPr>
@@ -7110,7 +7110,7 @@
           <p:cNvPr id="7" name="">
             <a:extLst xmlns:a="http://schemas.openxmlformats.org/drawingml/2006/main">
               <a:ext uri="{FF2B5EF4-FFF2-40B4-BE49-F238E27FC236}">
-                <a16:creationId xmlns:a16="http://schemas.microsoft.com/office/drawing/2014/main" id="{B9A6B111-6697-4C8A-8FBC-9699D3380B5B}"/>
+                <a16:creationId xmlns:a16="http://schemas.microsoft.com/office/drawing/2014/main" id="{DA7E26C7-52CC-4C56-96E2-47F270555110}"/>
               </a:ext>
             </a:extLst>
           </p:cNvPr>
@@ -7142,7 +7142,7 @@
           <p:cNvPr id="8" name="">
             <a:extLst xmlns:a="http://schemas.openxmlformats.org/drawingml/2006/main">
               <a:ext uri="{FF2B5EF4-FFF2-40B4-BE49-F238E27FC236}">
-                <a16:creationId xmlns:a16="http://schemas.microsoft.com/office/drawing/2014/main" id="{3027A3C8-A7B2-498B-9A5D-687569BE681D}"/>
+                <a16:creationId xmlns:a16="http://schemas.microsoft.com/office/drawing/2014/main" id="{EE8A44B3-5547-4C9B-81DF-97357A51723A}"/>
               </a:ext>
             </a:extLst>
           </p:cNvPr>
@@ -7199,7 +7199,7 @@
           <p:cNvPr id="9" name="">
             <a:extLst xmlns:a="http://schemas.openxmlformats.org/drawingml/2006/main">
               <a:ext uri="{FF2B5EF4-FFF2-40B4-BE49-F238E27FC236}">
-                <a16:creationId xmlns:a16="http://schemas.microsoft.com/office/drawing/2014/main" id="{BE51D659-8402-450F-8726-799866B4A32E}"/>
+                <a16:creationId xmlns:a16="http://schemas.microsoft.com/office/drawing/2014/main" id="{B0A7D406-8932-4DC7-9066-6F275B59BF4F}"/>
               </a:ext>
             </a:extLst>
           </p:cNvPr>
@@ -7256,7 +7256,7 @@
           <p:cNvPr id="10" name="">
             <a:extLst xmlns:a="http://schemas.openxmlformats.org/drawingml/2006/main">
               <a:ext uri="{FF2B5EF4-FFF2-40B4-BE49-F238E27FC236}">
-                <a16:creationId xmlns:a16="http://schemas.microsoft.com/office/drawing/2014/main" id="{CE6C5E04-FE3F-45AB-8767-B26B81499E00}"/>
+                <a16:creationId xmlns:a16="http://schemas.microsoft.com/office/drawing/2014/main" id="{674C2DE1-DB5C-445E-9908-57FCD95E7A58}"/>
               </a:ext>
             </a:extLst>
           </p:cNvPr>
@@ -7313,7 +7313,7 @@
           <p:cNvPr id="11" name="">
             <a:extLst xmlns:a="http://schemas.openxmlformats.org/drawingml/2006/main">
               <a:ext uri="{FF2B5EF4-FFF2-40B4-BE49-F238E27FC236}">
-                <a16:creationId xmlns:a16="http://schemas.microsoft.com/office/drawing/2014/main" id="{D82C6BDA-5237-4937-8094-DBF86F39E0C9}"/>
+                <a16:creationId xmlns:a16="http://schemas.microsoft.com/office/drawing/2014/main" id="{DD294D3E-3E8A-45E6-A409-B6074DCB3DDE}"/>
               </a:ext>
             </a:extLst>
           </p:cNvPr>
@@ -7345,7 +7345,7 @@
           <p:cNvPr id="12" name="">
             <a:extLst xmlns:a="http://schemas.openxmlformats.org/drawingml/2006/main">
               <a:ext uri="{FF2B5EF4-FFF2-40B4-BE49-F238E27FC236}">
-                <a16:creationId xmlns:a16="http://schemas.microsoft.com/office/drawing/2014/main" id="{68F8D976-B303-4355-8540-EFDE81B32364}"/>
+                <a16:creationId xmlns:a16="http://schemas.microsoft.com/office/drawing/2014/main" id="{237ED87B-B4A0-45D1-95D4-B9F7B8408A0B}"/>
               </a:ext>
             </a:extLst>
           </p:cNvPr>
@@ -7402,7 +7402,7 @@
           <p:cNvPr id="13" name="">
             <a:extLst xmlns:a="http://schemas.openxmlformats.org/drawingml/2006/main">
               <a:ext uri="{FF2B5EF4-FFF2-40B4-BE49-F238E27FC236}">
-                <a16:creationId xmlns:a16="http://schemas.microsoft.com/office/drawing/2014/main" id="{FFE47013-9BBE-4552-9991-E921CE05A103}"/>
+                <a16:creationId xmlns:a16="http://schemas.microsoft.com/office/drawing/2014/main" id="{CE133821-E889-4036-92DC-D76EC293E250}"/>
               </a:ext>
             </a:extLst>
           </p:cNvPr>
@@ -7459,7 +7459,7 @@
           <p:cNvPr id="14" name="">
             <a:extLst xmlns:a="http://schemas.openxmlformats.org/drawingml/2006/main">
               <a:ext uri="{FF2B5EF4-FFF2-40B4-BE49-F238E27FC236}">
-                <a16:creationId xmlns:a16="http://schemas.microsoft.com/office/drawing/2014/main" id="{B9087387-9858-420D-A86B-FA0901CB5367}"/>
+                <a16:creationId xmlns:a16="http://schemas.microsoft.com/office/drawing/2014/main" id="{D9C8826E-02C4-4567-B129-F09DAA4468B6}"/>
               </a:ext>
             </a:extLst>
           </p:cNvPr>
@@ -7516,7 +7516,7 @@
           <p:cNvPr id="15" name="">
             <a:extLst xmlns:a="http://schemas.openxmlformats.org/drawingml/2006/main">
               <a:ext uri="{FF2B5EF4-FFF2-40B4-BE49-F238E27FC236}">
-                <a16:creationId xmlns:a16="http://schemas.microsoft.com/office/drawing/2014/main" id="{C8648341-4E4B-4E15-8F60-510EA46DBF9B}"/>
+                <a16:creationId xmlns:a16="http://schemas.microsoft.com/office/drawing/2014/main" id="{3191F9A5-BB08-4734-9929-2204A24D2301}"/>
               </a:ext>
             </a:extLst>
           </p:cNvPr>
@@ -7571,7 +7571,7 @@
     </p:spTree>
     <p:extLst>
       <p:ext uri="{BB962C8B-B14F-4D97-AF65-F5344CB8AC3E}">
-        <p14:creationId xmlns:p14="http://schemas.microsoft.com/office/powerpoint/2010/main" val="1272883528"/>
+        <p14:creationId xmlns:p14="http://schemas.microsoft.com/office/powerpoint/2010/main" val="744909254"/>
       </p:ext>
     </p:extLst>
   </p:cSld>
@@ -7769,10 +7769,10 @@
       </p:grpSpPr>
       <p:sp>
         <p:nvSpPr>
-          <p:cNvPr id="23" name="">
-            <a:extLst xmlns:a="http://schemas.openxmlformats.org/drawingml/2006/main">
-              <a:ext uri="{FF2B5EF4-FFF2-40B4-BE49-F238E27FC236}">
-                <a16:creationId xmlns:a16="http://schemas.microsoft.com/office/drawing/2014/main" id="{1A453A6F-70CE-485B-A5F1-A4E273D94551}"/>
+          <p:cNvPr id="26" name="">
+            <a:extLst xmlns:a="http://schemas.openxmlformats.org/drawingml/2006/main">
+              <a:ext uri="{FF2B5EF4-FFF2-40B4-BE49-F238E27FC236}">
+                <a16:creationId xmlns:a16="http://schemas.microsoft.com/office/drawing/2014/main" id="{0921B207-BCC3-4E42-B104-EB076640324F}"/>
               </a:ext>
             </a:extLst>
           </p:cNvPr>
@@ -7804,7 +7804,7 @@
           <p:cNvPr id="2" name="">
             <a:extLst xmlns:a="http://schemas.openxmlformats.org/drawingml/2006/main">
               <a:ext uri="{FF2B5EF4-FFF2-40B4-BE49-F238E27FC236}">
-                <a16:creationId xmlns:a16="http://schemas.microsoft.com/office/drawing/2014/main" id="{65BF0D13-6774-4369-9123-BDC54AFF69B2}"/>
+                <a16:creationId xmlns:a16="http://schemas.microsoft.com/office/drawing/2014/main" id="{5E98FB3B-F4B4-44EA-894C-50B9812E1172}"/>
               </a:ext>
             </a:extLst>
           </p:cNvPr>
@@ -7861,7 +7861,7 @@
           <p:cNvPr id="3" name="">
             <a:extLst xmlns:a="http://schemas.openxmlformats.org/drawingml/2006/main">
               <a:ext uri="{FF2B5EF4-FFF2-40B4-BE49-F238E27FC236}">
-                <a16:creationId xmlns:a16="http://schemas.microsoft.com/office/drawing/2014/main" id="{BF860222-B6DB-4C04-B26D-5040ABF52842}"/>
+                <a16:creationId xmlns:a16="http://schemas.microsoft.com/office/drawing/2014/main" id="{0D5BDE0C-9FEB-40C1-89D5-15F7FB6B0984}"/>
               </a:ext>
             </a:extLst>
           </p:cNvPr>
@@ -7893,7 +7893,7 @@
           <p:cNvPr id="4" name="">
             <a:extLst xmlns:a="http://schemas.openxmlformats.org/drawingml/2006/main">
               <a:ext uri="{FF2B5EF4-FFF2-40B4-BE49-F238E27FC236}">
-                <a16:creationId xmlns:a16="http://schemas.microsoft.com/office/drawing/2014/main" id="{81684B47-1791-458C-8437-98212BAC38F0}"/>
+                <a16:creationId xmlns:a16="http://schemas.microsoft.com/office/drawing/2014/main" id="{D5FAFD4E-9659-41EA-B3FF-917A451DBB78}"/>
               </a:ext>
             </a:extLst>
           </p:cNvPr>
@@ -7950,7 +7950,7 @@
           <p:cNvPr id="5" name="">
             <a:extLst xmlns:a="http://schemas.openxmlformats.org/drawingml/2006/main">
               <a:ext uri="{FF2B5EF4-FFF2-40B4-BE49-F238E27FC236}">
-                <a16:creationId xmlns:a16="http://schemas.microsoft.com/office/drawing/2014/main" id="{DB373610-D3E3-4B12-901D-F805B4FCF00A}"/>
+                <a16:creationId xmlns:a16="http://schemas.microsoft.com/office/drawing/2014/main" id="{8CFDF4A6-DD38-4675-A1BD-E1D0534542D4}"/>
               </a:ext>
             </a:extLst>
           </p:cNvPr>
@@ -8007,7 +8007,7 @@
           <p:cNvPr id="6" name="">
             <a:extLst xmlns:a="http://schemas.openxmlformats.org/drawingml/2006/main">
               <a:ext uri="{FF2B5EF4-FFF2-40B4-BE49-F238E27FC236}">
-                <a16:creationId xmlns:a16="http://schemas.microsoft.com/office/drawing/2014/main" id="{6D2017FF-0AE1-4555-B533-4C6D036B1554}"/>
+                <a16:creationId xmlns:a16="http://schemas.microsoft.com/office/drawing/2014/main" id="{5F6F3C19-3FDC-4A81-9A33-5EC8E2341CEE}"/>
               </a:ext>
             </a:extLst>
           </p:cNvPr>
@@ -8064,7 +8064,7 @@
           <p:cNvPr id="7" name="">
             <a:extLst xmlns:a="http://schemas.openxmlformats.org/drawingml/2006/main">
               <a:ext uri="{FF2B5EF4-FFF2-40B4-BE49-F238E27FC236}">
-                <a16:creationId xmlns:a16="http://schemas.microsoft.com/office/drawing/2014/main" id="{B9DBD87A-0F06-48B6-9290-C9D81F9EA2D9}"/>
+                <a16:creationId xmlns:a16="http://schemas.microsoft.com/office/drawing/2014/main" id="{63C31B5C-7D73-4677-8DA8-43D0CFDD4546}"/>
               </a:ext>
             </a:extLst>
           </p:cNvPr>
@@ -8096,7 +8096,7 @@
           <p:cNvPr id="8" name="">
             <a:extLst xmlns:a="http://schemas.openxmlformats.org/drawingml/2006/main">
               <a:ext uri="{FF2B5EF4-FFF2-40B4-BE49-F238E27FC236}">
-                <a16:creationId xmlns:a16="http://schemas.microsoft.com/office/drawing/2014/main" id="{F67CA0DD-27CD-4D07-910D-11CD0B8F1D7A}"/>
+                <a16:creationId xmlns:a16="http://schemas.microsoft.com/office/drawing/2014/main" id="{32B79479-34E5-4E79-A228-8E817F7CA0BC}"/>
               </a:ext>
             </a:extLst>
           </p:cNvPr>
@@ -8153,7 +8153,7 @@
           <p:cNvPr id="9" name="">
             <a:extLst xmlns:a="http://schemas.openxmlformats.org/drawingml/2006/main">
               <a:ext uri="{FF2B5EF4-FFF2-40B4-BE49-F238E27FC236}">
-                <a16:creationId xmlns:a16="http://schemas.microsoft.com/office/drawing/2014/main" id="{A2C2C287-0D8C-4D6E-B375-86BDA3A60A7F}"/>
+                <a16:creationId xmlns:a16="http://schemas.microsoft.com/office/drawing/2014/main" id="{5B91FF4C-D682-4D72-B074-59C877E371EE}"/>
               </a:ext>
             </a:extLst>
           </p:cNvPr>
@@ -8210,19 +8210,19 @@
           <p:cNvPr id="10" name="">
             <a:extLst xmlns:a="http://schemas.openxmlformats.org/drawingml/2006/main">
               <a:ext uri="{FF2B5EF4-FFF2-40B4-BE49-F238E27FC236}">
-                <a16:creationId xmlns:a16="http://schemas.microsoft.com/office/drawing/2014/main" id="{724339DD-662F-47AC-A719-641EE4C8D73F}"/>
-              </a:ext>
-            </a:extLst>
-          </p:cNvPr>
-          <p:cNvSpPr>
-            <a:spLocks xmlns:a="http://schemas.openxmlformats.org/drawingml/2006/main" noGrp="1"/>
-          </p:cNvSpPr>
-          <p:nvPr/>
-        </p:nvSpPr>
-        <p:spPr>
-          <a:xfrm xmlns:a="http://schemas.openxmlformats.org/drawingml/2006/main">
-            <a:off x="914400" y="1257300"/>
-            <a:ext cx="10363200" cy="781050"/>
+                <a16:creationId xmlns:a16="http://schemas.microsoft.com/office/drawing/2014/main" id="{A24332E1-5315-4053-94A6-57EDFF4238A1}"/>
+              </a:ext>
+            </a:extLst>
+          </p:cNvPr>
+          <p:cNvSpPr>
+            <a:spLocks xmlns:a="http://schemas.openxmlformats.org/drawingml/2006/main" noGrp="1"/>
+          </p:cNvSpPr>
+          <p:nvPr/>
+        </p:nvSpPr>
+        <p:spPr>
+          <a:xfrm xmlns:a="http://schemas.openxmlformats.org/drawingml/2006/main">
+            <a:off x="857250" y="1219200"/>
+            <a:ext cx="10477500" cy="742950"/>
           </a:xfrm>
           <a:prstGeom xmlns:a="http://schemas.openxmlformats.org/drawingml/2006/main" prst="rect">
             <a:avLst/>
@@ -8239,7 +8239,7 @@
           <a:lstStyle xmlns:a="http://schemas.openxmlformats.org/drawingml/2006/main"/>
           <a:p xmlns:a="http://schemas.openxmlformats.org/drawingml/2006/main">
             <a:pPr algn="ctr">
-              <a:defRPr sz="2175" b="1">
+              <a:defRPr sz="2100" b="1">
                 <a:solidFill>
                   <a:srgbClr val="17253A"/>
                 </a:solidFill>
@@ -8249,7 +8249,7 @@
               </a:defRPr>
             </a:pPr>
             <a:r>
-              <a:rPr sz="2175" b="1">
+              <a:rPr sz="2100" b="1">
                 <a:solidFill>
                   <a:srgbClr val="17253A"/>
                 </a:solidFill>
@@ -8267,28 +8267,30 @@
           <p:cNvPr id="11" name="">
             <a:extLst xmlns:a="http://schemas.openxmlformats.org/drawingml/2006/main">
               <a:ext uri="{FF2B5EF4-FFF2-40B4-BE49-F238E27FC236}">
-                <a16:creationId xmlns:a16="http://schemas.microsoft.com/office/drawing/2014/main" id="{C82C1E1D-F107-4ABD-A136-0F5D952E9282}"/>
-              </a:ext>
-            </a:extLst>
-          </p:cNvPr>
-          <p:cNvSpPr>
-            <a:spLocks xmlns:a="http://schemas.openxmlformats.org/drawingml/2006/main" noGrp="1"/>
-          </p:cNvSpPr>
-          <p:nvPr/>
-        </p:nvSpPr>
-        <p:spPr>
-          <a:xfrm xmlns:a="http://schemas.openxmlformats.org/drawingml/2006/main">
-            <a:off x="1000125" y="2247900"/>
-            <a:ext cx="476250" cy="476250"/>
-          </a:xfrm>
-          <a:prstGeom xmlns:a="http://schemas.openxmlformats.org/drawingml/2006/main" prst="ellipse">
+                <a16:creationId xmlns:a16="http://schemas.microsoft.com/office/drawing/2014/main" id="{FC1A8424-A655-4339-A23E-3896ED6B882B}"/>
+              </a:ext>
+            </a:extLst>
+          </p:cNvPr>
+          <p:cNvSpPr>
+            <a:spLocks xmlns:a="http://schemas.openxmlformats.org/drawingml/2006/main" noGrp="1"/>
+          </p:cNvSpPr>
+          <p:nvPr/>
+        </p:nvSpPr>
+        <p:spPr>
+          <a:xfrm xmlns:a="http://schemas.openxmlformats.org/drawingml/2006/main">
+            <a:off x="971550" y="2124075"/>
+            <a:ext cx="38100" cy="3524250"/>
+          </a:xfrm>
+          <a:prstGeom xmlns:a="http://schemas.openxmlformats.org/drawingml/2006/main" prst="rect">
             <a:avLst/>
           </a:prstGeom>
           <a:solidFill xmlns:a="http://schemas.openxmlformats.org/drawingml/2006/main">
-            <a:srgbClr val="18324A"/>
+            <a:srgbClr val="2C6E73"/>
           </a:solidFill>
           <a:ln xmlns:a="http://schemas.openxmlformats.org/drawingml/2006/main" w="0">
-            <a:noFill/>
+            <a:solidFill>
+              <a:srgbClr val="2C6E73"/>
+            </a:solidFill>
           </a:ln>
         </p:spPr>
       </p:sp>
@@ -8297,19 +8299,19 @@
           <p:cNvPr id="12" name="">
             <a:extLst xmlns:a="http://schemas.openxmlformats.org/drawingml/2006/main">
               <a:ext uri="{FF2B5EF4-FFF2-40B4-BE49-F238E27FC236}">
-                <a16:creationId xmlns:a16="http://schemas.microsoft.com/office/drawing/2014/main" id="{BD56FDED-0166-44CF-91F9-34C0074A0CD2}"/>
-              </a:ext>
-            </a:extLst>
-          </p:cNvPr>
-          <p:cNvSpPr>
-            <a:spLocks xmlns:a="http://schemas.openxmlformats.org/drawingml/2006/main" noGrp="1"/>
-          </p:cNvSpPr>
-          <p:nvPr/>
-        </p:nvSpPr>
-        <p:spPr>
-          <a:xfrm xmlns:a="http://schemas.openxmlformats.org/drawingml/2006/main">
-            <a:off x="1000125" y="2276475"/>
-            <a:ext cx="476250" cy="419100"/>
+                <a16:creationId xmlns:a16="http://schemas.microsoft.com/office/drawing/2014/main" id="{EE2170D3-4E37-443B-B26D-1B27EA64745E}"/>
+              </a:ext>
+            </a:extLst>
+          </p:cNvPr>
+          <p:cNvSpPr>
+            <a:spLocks xmlns:a="http://schemas.openxmlformats.org/drawingml/2006/main" noGrp="1"/>
+          </p:cNvSpPr>
+          <p:nvPr/>
+        </p:nvSpPr>
+        <p:spPr>
+          <a:xfrm xmlns:a="http://schemas.openxmlformats.org/drawingml/2006/main">
+            <a:off x="1162050" y="2200275"/>
+            <a:ext cx="400050" cy="400050"/>
           </a:xfrm>
           <a:prstGeom xmlns:a="http://schemas.openxmlformats.org/drawingml/2006/main" prst="rect">
             <a:avLst/>
@@ -8326,9 +8328,9 @@
           <a:lstStyle xmlns:a="http://schemas.openxmlformats.org/drawingml/2006/main"/>
           <a:p xmlns:a="http://schemas.openxmlformats.org/drawingml/2006/main">
             <a:pPr algn="ctr">
-              <a:defRPr sz="1350" b="1">
-                <a:solidFill>
-                  <a:srgbClr val="FFFFFF"/>
+              <a:defRPr sz="1125" b="1">
+                <a:solidFill>
+                  <a:srgbClr val="2C6E73"/>
                 </a:solidFill>
                 <a:latin typeface="Arial"/>
                 <a:ea typeface="Arial"/>
@@ -8336,9 +8338,9 @@
               </a:defRPr>
             </a:pPr>
             <a:r>
-              <a:rPr sz="1350" b="1">
-                <a:solidFill>
-                  <a:srgbClr val="FFFFFF"/>
+              <a:rPr sz="1125" b="1">
+                <a:solidFill>
+                  <a:srgbClr val="2C6E73"/>
                 </a:solidFill>
                 <a:latin typeface="Arial"/>
                 <a:ea typeface="Arial"/>
@@ -8354,19 +8356,19 @@
           <p:cNvPr id="13" name="">
             <a:extLst xmlns:a="http://schemas.openxmlformats.org/drawingml/2006/main">
               <a:ext uri="{FF2B5EF4-FFF2-40B4-BE49-F238E27FC236}">
-                <a16:creationId xmlns:a16="http://schemas.microsoft.com/office/drawing/2014/main" id="{380F3AC8-E8B9-4232-A502-A0F2AADA1096}"/>
-              </a:ext>
-            </a:extLst>
-          </p:cNvPr>
-          <p:cNvSpPr>
-            <a:spLocks xmlns:a="http://schemas.openxmlformats.org/drawingml/2006/main" noGrp="1"/>
-          </p:cNvSpPr>
-          <p:nvPr/>
-        </p:nvSpPr>
-        <p:spPr>
-          <a:xfrm xmlns:a="http://schemas.openxmlformats.org/drawingml/2006/main">
-            <a:off x="1714500" y="2181225"/>
-            <a:ext cx="9429750" cy="609600"/>
+                <a16:creationId xmlns:a16="http://schemas.microsoft.com/office/drawing/2014/main" id="{A04A55EB-CA55-4324-8DDC-DC6DF83F5597}"/>
+              </a:ext>
+            </a:extLst>
+          </p:cNvPr>
+          <p:cNvSpPr>
+            <a:spLocks xmlns:a="http://schemas.openxmlformats.org/drawingml/2006/main" noGrp="1"/>
+          </p:cNvSpPr>
+          <p:nvPr/>
+        </p:nvSpPr>
+        <p:spPr>
+          <a:xfrm xmlns:a="http://schemas.openxmlformats.org/drawingml/2006/main">
+            <a:off x="1714500" y="2114550"/>
+            <a:ext cx="9525000" cy="638175"/>
           </a:xfrm>
           <a:prstGeom xmlns:a="http://schemas.openxmlformats.org/drawingml/2006/main" prst="rect">
             <a:avLst/>
@@ -8383,7 +8385,7 @@
           <a:lstStyle xmlns:a="http://schemas.openxmlformats.org/drawingml/2006/main"/>
           <a:p xmlns:a="http://schemas.openxmlformats.org/drawingml/2006/main">
             <a:pPr algn="l">
-              <a:defRPr sz="1500" b="0">
+              <a:defRPr sz="1575" b="0">
                 <a:solidFill>
                   <a:srgbClr val="17253A"/>
                 </a:solidFill>
@@ -8393,7 +8395,7 @@
               </a:defRPr>
             </a:pPr>
             <a:r>
-              <a:rPr sz="1500" b="0">
+              <a:rPr sz="1575" b="0">
                 <a:solidFill>
                   <a:srgbClr val="17253A"/>
                 </a:solidFill>
@@ -8401,7 +8403,7 @@
                 <a:ea typeface="Arial"/>
                 <a:cs typeface="Arial"/>
               </a:rPr>
-              <a:t>Identify the structure: Notice the number structure before choosing a method.</a:t>
+              <a:t>Claim: 7,056 ÷ 24 = 294</a:t>
             </a:r>
           </a:p>
         </p:txBody>
@@ -8411,28 +8413,30 @@
           <p:cNvPr id="14" name="">
             <a:extLst xmlns:a="http://schemas.openxmlformats.org/drawingml/2006/main">
               <a:ext uri="{FF2B5EF4-FFF2-40B4-BE49-F238E27FC236}">
-                <a16:creationId xmlns:a16="http://schemas.microsoft.com/office/drawing/2014/main" id="{38DA911B-45A9-4A64-8B7F-417F7FC4E387}"/>
-              </a:ext>
-            </a:extLst>
-          </p:cNvPr>
-          <p:cNvSpPr>
-            <a:spLocks xmlns:a="http://schemas.openxmlformats.org/drawingml/2006/main" noGrp="1"/>
-          </p:cNvSpPr>
-          <p:nvPr/>
-        </p:nvSpPr>
-        <p:spPr>
-          <a:xfrm xmlns:a="http://schemas.openxmlformats.org/drawingml/2006/main">
-            <a:off x="1000125" y="2990850"/>
-            <a:ext cx="476250" cy="476250"/>
-          </a:xfrm>
-          <a:prstGeom xmlns:a="http://schemas.openxmlformats.org/drawingml/2006/main" prst="ellipse">
+                <a16:creationId xmlns:a16="http://schemas.microsoft.com/office/drawing/2014/main" id="{5CCAC91D-08CC-4805-8C5D-CB5DD472BFCB}"/>
+              </a:ext>
+            </a:extLst>
+          </p:cNvPr>
+          <p:cNvSpPr>
+            <a:spLocks xmlns:a="http://schemas.openxmlformats.org/drawingml/2006/main" noGrp="1"/>
+          </p:cNvSpPr>
+          <p:nvPr/>
+        </p:nvSpPr>
+        <p:spPr>
+          <a:xfrm xmlns:a="http://schemas.openxmlformats.org/drawingml/2006/main">
+            <a:off x="1714500" y="2771775"/>
+            <a:ext cx="9334500" cy="9525"/>
+          </a:xfrm>
+          <a:prstGeom xmlns:a="http://schemas.openxmlformats.org/drawingml/2006/main" prst="rect">
             <a:avLst/>
           </a:prstGeom>
           <a:solidFill xmlns:a="http://schemas.openxmlformats.org/drawingml/2006/main">
-            <a:srgbClr val="2C6E73"/>
+            <a:srgbClr val="D9E0E6"/>
           </a:solidFill>
           <a:ln xmlns:a="http://schemas.openxmlformats.org/drawingml/2006/main" w="0">
-            <a:noFill/>
+            <a:solidFill>
+              <a:srgbClr val="D9E0E6"/>
+            </a:solidFill>
           </a:ln>
         </p:spPr>
       </p:sp>
@@ -8441,19 +8445,19 @@
           <p:cNvPr id="15" name="">
             <a:extLst xmlns:a="http://schemas.openxmlformats.org/drawingml/2006/main">
               <a:ext uri="{FF2B5EF4-FFF2-40B4-BE49-F238E27FC236}">
-                <a16:creationId xmlns:a16="http://schemas.microsoft.com/office/drawing/2014/main" id="{42040D61-7FED-42D4-9784-C15CFEC548D6}"/>
-              </a:ext>
-            </a:extLst>
-          </p:cNvPr>
-          <p:cNvSpPr>
-            <a:spLocks xmlns:a="http://schemas.openxmlformats.org/drawingml/2006/main" noGrp="1"/>
-          </p:cNvSpPr>
-          <p:nvPr/>
-        </p:nvSpPr>
-        <p:spPr>
-          <a:xfrm xmlns:a="http://schemas.openxmlformats.org/drawingml/2006/main">
-            <a:off x="1000125" y="3019425"/>
-            <a:ext cx="476250" cy="419100"/>
+                <a16:creationId xmlns:a16="http://schemas.microsoft.com/office/drawing/2014/main" id="{AB850E45-7F9B-4D2C-A2CE-82469E6B19EE}"/>
+              </a:ext>
+            </a:extLst>
+          </p:cNvPr>
+          <p:cNvSpPr>
+            <a:spLocks xmlns:a="http://schemas.openxmlformats.org/drawingml/2006/main" noGrp="1"/>
+          </p:cNvSpPr>
+          <p:nvPr/>
+        </p:nvSpPr>
+        <p:spPr>
+          <a:xfrm xmlns:a="http://schemas.openxmlformats.org/drawingml/2006/main">
+            <a:off x="1162050" y="2905125"/>
+            <a:ext cx="400050" cy="400050"/>
           </a:xfrm>
           <a:prstGeom xmlns:a="http://schemas.openxmlformats.org/drawingml/2006/main" prst="rect">
             <a:avLst/>
@@ -8470,9 +8474,9 @@
           <a:lstStyle xmlns:a="http://schemas.openxmlformats.org/drawingml/2006/main"/>
           <a:p xmlns:a="http://schemas.openxmlformats.org/drawingml/2006/main">
             <a:pPr algn="ctr">
-              <a:defRPr sz="1350" b="1">
-                <a:solidFill>
-                  <a:srgbClr val="FFFFFF"/>
+              <a:defRPr sz="1125" b="1">
+                <a:solidFill>
+                  <a:srgbClr val="2C6E73"/>
                 </a:solidFill>
                 <a:latin typeface="Arial"/>
                 <a:ea typeface="Arial"/>
@@ -8480,9 +8484,9 @@
               </a:defRPr>
             </a:pPr>
             <a:r>
-              <a:rPr sz="1350" b="1">
-                <a:solidFill>
-                  <a:srgbClr val="FFFFFF"/>
+              <a:rPr sz="1125" b="1">
+                <a:solidFill>
+                  <a:srgbClr val="2C6E73"/>
                 </a:solidFill>
                 <a:latin typeface="Arial"/>
                 <a:ea typeface="Arial"/>
@@ -8498,19 +8502,19 @@
           <p:cNvPr id="16" name="">
             <a:extLst xmlns:a="http://schemas.openxmlformats.org/drawingml/2006/main">
               <a:ext uri="{FF2B5EF4-FFF2-40B4-BE49-F238E27FC236}">
-                <a16:creationId xmlns:a16="http://schemas.microsoft.com/office/drawing/2014/main" id="{B97322F9-9AFF-4348-A4E7-385CB7C4D660}"/>
-              </a:ext>
-            </a:extLst>
-          </p:cNvPr>
-          <p:cNvSpPr>
-            <a:spLocks xmlns:a="http://schemas.openxmlformats.org/drawingml/2006/main" noGrp="1"/>
-          </p:cNvSpPr>
-          <p:nvPr/>
-        </p:nvSpPr>
-        <p:spPr>
-          <a:xfrm xmlns:a="http://schemas.openxmlformats.org/drawingml/2006/main">
-            <a:off x="1714500" y="2924175"/>
-            <a:ext cx="9429750" cy="609600"/>
+                <a16:creationId xmlns:a16="http://schemas.microsoft.com/office/drawing/2014/main" id="{7F857ACC-764D-462E-9A7C-D968A80298F2}"/>
+              </a:ext>
+            </a:extLst>
+          </p:cNvPr>
+          <p:cNvSpPr>
+            <a:spLocks xmlns:a="http://schemas.openxmlformats.org/drawingml/2006/main" noGrp="1"/>
+          </p:cNvSpPr>
+          <p:nvPr/>
+        </p:nvSpPr>
+        <p:spPr>
+          <a:xfrm xmlns:a="http://schemas.openxmlformats.org/drawingml/2006/main">
+            <a:off x="1714500" y="2819400"/>
+            <a:ext cx="9525000" cy="638175"/>
           </a:xfrm>
           <a:prstGeom xmlns:a="http://schemas.openxmlformats.org/drawingml/2006/main" prst="rect">
             <a:avLst/>
@@ -8527,7 +8531,7 @@
           <a:lstStyle xmlns:a="http://schemas.openxmlformats.org/drawingml/2006/main"/>
           <a:p xmlns:a="http://schemas.openxmlformats.org/drawingml/2006/main">
             <a:pPr algn="l">
-              <a:defRPr sz="1500" b="0">
+              <a:defRPr sz="1575" b="0">
                 <a:solidFill>
                   <a:srgbClr val="17253A"/>
                 </a:solidFill>
@@ -8537,7 +8541,7 @@
               </a:defRPr>
             </a:pPr>
             <a:r>
-              <a:rPr sz="1500" b="0">
+              <a:rPr sz="1575" b="0">
                 <a:solidFill>
                   <a:srgbClr val="17253A"/>
                 </a:solidFill>
@@ -8545,7 +8549,7 @@
                 <a:ea typeface="Arial"/>
                 <a:cs typeface="Arial"/>
               </a:rPr>
-              <a:t>Set up the method: Use a known fact, partition or compensation to calculate efficiently.</a:t>
+              <a:t>Check with the inverse: 294 × 24</a:t>
             </a:r>
           </a:p>
         </p:txBody>
@@ -8555,28 +8559,30 @@
           <p:cNvPr id="17" name="">
             <a:extLst xmlns:a="http://schemas.openxmlformats.org/drawingml/2006/main">
               <a:ext uri="{FF2B5EF4-FFF2-40B4-BE49-F238E27FC236}">
-                <a16:creationId xmlns:a16="http://schemas.microsoft.com/office/drawing/2014/main" id="{603C3709-C69F-4A43-ABA4-412C3A026592}"/>
-              </a:ext>
-            </a:extLst>
-          </p:cNvPr>
-          <p:cNvSpPr>
-            <a:spLocks xmlns:a="http://schemas.openxmlformats.org/drawingml/2006/main" noGrp="1"/>
-          </p:cNvSpPr>
-          <p:nvPr/>
-        </p:nvSpPr>
-        <p:spPr>
-          <a:xfrm xmlns:a="http://schemas.openxmlformats.org/drawingml/2006/main">
-            <a:off x="1000125" y="3733800"/>
-            <a:ext cx="476250" cy="476250"/>
-          </a:xfrm>
-          <a:prstGeom xmlns:a="http://schemas.openxmlformats.org/drawingml/2006/main" prst="ellipse">
+                <a16:creationId xmlns:a16="http://schemas.microsoft.com/office/drawing/2014/main" id="{FEE3EB63-E068-4AB8-8109-DE00A7219AF7}"/>
+              </a:ext>
+            </a:extLst>
+          </p:cNvPr>
+          <p:cNvSpPr>
+            <a:spLocks xmlns:a="http://schemas.openxmlformats.org/drawingml/2006/main" noGrp="1"/>
+          </p:cNvSpPr>
+          <p:nvPr/>
+        </p:nvSpPr>
+        <p:spPr>
+          <a:xfrm xmlns:a="http://schemas.openxmlformats.org/drawingml/2006/main">
+            <a:off x="1714500" y="3476625"/>
+            <a:ext cx="9334500" cy="9525"/>
+          </a:xfrm>
+          <a:prstGeom xmlns:a="http://schemas.openxmlformats.org/drawingml/2006/main" prst="rect">
             <a:avLst/>
           </a:prstGeom>
           <a:solidFill xmlns:a="http://schemas.openxmlformats.org/drawingml/2006/main">
-            <a:srgbClr val="2C6E73"/>
+            <a:srgbClr val="D9E0E6"/>
           </a:solidFill>
           <a:ln xmlns:a="http://schemas.openxmlformats.org/drawingml/2006/main" w="0">
-            <a:noFill/>
+            <a:solidFill>
+              <a:srgbClr val="D9E0E6"/>
+            </a:solidFill>
           </a:ln>
         </p:spPr>
       </p:sp>
@@ -8585,19 +8591,19 @@
           <p:cNvPr id="18" name="">
             <a:extLst xmlns:a="http://schemas.openxmlformats.org/drawingml/2006/main">
               <a:ext uri="{FF2B5EF4-FFF2-40B4-BE49-F238E27FC236}">
-                <a16:creationId xmlns:a16="http://schemas.microsoft.com/office/drawing/2014/main" id="{C00D3306-B7A0-4329-B5CF-DFA882E3D827}"/>
-              </a:ext>
-            </a:extLst>
-          </p:cNvPr>
-          <p:cNvSpPr>
-            <a:spLocks xmlns:a="http://schemas.openxmlformats.org/drawingml/2006/main" noGrp="1"/>
-          </p:cNvSpPr>
-          <p:nvPr/>
-        </p:nvSpPr>
-        <p:spPr>
-          <a:xfrm xmlns:a="http://schemas.openxmlformats.org/drawingml/2006/main">
-            <a:off x="1000125" y="3762375"/>
-            <a:ext cx="476250" cy="419100"/>
+                <a16:creationId xmlns:a16="http://schemas.microsoft.com/office/drawing/2014/main" id="{67ECDB82-CF75-4BD9-B1BB-8519008C3CB4}"/>
+              </a:ext>
+            </a:extLst>
+          </p:cNvPr>
+          <p:cNvSpPr>
+            <a:spLocks xmlns:a="http://schemas.openxmlformats.org/drawingml/2006/main" noGrp="1"/>
+          </p:cNvSpPr>
+          <p:nvPr/>
+        </p:nvSpPr>
+        <p:spPr>
+          <a:xfrm xmlns:a="http://schemas.openxmlformats.org/drawingml/2006/main">
+            <a:off x="1162050" y="3609975"/>
+            <a:ext cx="400050" cy="400050"/>
           </a:xfrm>
           <a:prstGeom xmlns:a="http://schemas.openxmlformats.org/drawingml/2006/main" prst="rect">
             <a:avLst/>
@@ -8614,9 +8620,9 @@
           <a:lstStyle xmlns:a="http://schemas.openxmlformats.org/drawingml/2006/main"/>
           <a:p xmlns:a="http://schemas.openxmlformats.org/drawingml/2006/main">
             <a:pPr algn="ctr">
-              <a:defRPr sz="1350" b="1">
-                <a:solidFill>
-                  <a:srgbClr val="FFFFFF"/>
+              <a:defRPr sz="1125" b="1">
+                <a:solidFill>
+                  <a:srgbClr val="2C6E73"/>
                 </a:solidFill>
                 <a:latin typeface="Arial"/>
                 <a:ea typeface="Arial"/>
@@ -8624,9 +8630,9 @@
               </a:defRPr>
             </a:pPr>
             <a:r>
-              <a:rPr sz="1350" b="1">
-                <a:solidFill>
-                  <a:srgbClr val="FFFFFF"/>
+              <a:rPr sz="1125" b="1">
+                <a:solidFill>
+                  <a:srgbClr val="2C6E73"/>
                 </a:solidFill>
                 <a:latin typeface="Arial"/>
                 <a:ea typeface="Arial"/>
@@ -8642,19 +8648,19 @@
           <p:cNvPr id="19" name="">
             <a:extLst xmlns:a="http://schemas.openxmlformats.org/drawingml/2006/main">
               <a:ext uri="{FF2B5EF4-FFF2-40B4-BE49-F238E27FC236}">
-                <a16:creationId xmlns:a16="http://schemas.microsoft.com/office/drawing/2014/main" id="{9BE0BD10-5D68-49E2-8AB6-C8AE840C20B7}"/>
-              </a:ext>
-            </a:extLst>
-          </p:cNvPr>
-          <p:cNvSpPr>
-            <a:spLocks xmlns:a="http://schemas.openxmlformats.org/drawingml/2006/main" noGrp="1"/>
-          </p:cNvSpPr>
-          <p:nvPr/>
-        </p:nvSpPr>
-        <p:spPr>
-          <a:xfrm xmlns:a="http://schemas.openxmlformats.org/drawingml/2006/main">
-            <a:off x="1714500" y="3667125"/>
-            <a:ext cx="9429750" cy="609600"/>
+                <a16:creationId xmlns:a16="http://schemas.microsoft.com/office/drawing/2014/main" id="{53FE1F0D-B68D-49FC-95E7-A9015F4F3D28}"/>
+              </a:ext>
+            </a:extLst>
+          </p:cNvPr>
+          <p:cNvSpPr>
+            <a:spLocks xmlns:a="http://schemas.openxmlformats.org/drawingml/2006/main" noGrp="1"/>
+          </p:cNvSpPr>
+          <p:nvPr/>
+        </p:nvSpPr>
+        <p:spPr>
+          <a:xfrm xmlns:a="http://schemas.openxmlformats.org/drawingml/2006/main">
+            <a:off x="1714500" y="3524250"/>
+            <a:ext cx="9525000" cy="638175"/>
           </a:xfrm>
           <a:prstGeom xmlns:a="http://schemas.openxmlformats.org/drawingml/2006/main" prst="rect">
             <a:avLst/>
@@ -8671,7 +8677,7 @@
           <a:lstStyle xmlns:a="http://schemas.openxmlformats.org/drawingml/2006/main"/>
           <a:p xmlns:a="http://schemas.openxmlformats.org/drawingml/2006/main">
             <a:pPr algn="l">
-              <a:defRPr sz="1500" b="0">
+              <a:defRPr sz="1575" b="0">
                 <a:solidFill>
                   <a:srgbClr val="17253A"/>
                 </a:solidFill>
@@ -8681,7 +8687,7 @@
               </a:defRPr>
             </a:pPr>
             <a:r>
-              <a:rPr sz="1500" b="0">
+              <a:rPr sz="1575" b="0">
                 <a:solidFill>
                   <a:srgbClr val="17253A"/>
                 </a:solidFill>
@@ -8689,7 +8695,7 @@
                 <a:ea typeface="Arial"/>
                 <a:cs typeface="Arial"/>
               </a:rPr>
-              <a:t>Complete the calculation: 294 x 24 = 7,056, so the quotient is correct.</a:t>
+              <a:t>294 × 20 = 5,880     294 × 4 = 1,176</a:t>
             </a:r>
           </a:p>
         </p:txBody>
@@ -8699,28 +8705,30 @@
           <p:cNvPr id="20" name="">
             <a:extLst xmlns:a="http://schemas.openxmlformats.org/drawingml/2006/main">
               <a:ext uri="{FF2B5EF4-FFF2-40B4-BE49-F238E27FC236}">
-                <a16:creationId xmlns:a16="http://schemas.microsoft.com/office/drawing/2014/main" id="{805ADC0D-6F23-4348-8E24-A50F2F71F8CE}"/>
-              </a:ext>
-            </a:extLst>
-          </p:cNvPr>
-          <p:cNvSpPr>
-            <a:spLocks xmlns:a="http://schemas.openxmlformats.org/drawingml/2006/main" noGrp="1"/>
-          </p:cNvSpPr>
-          <p:nvPr/>
-        </p:nvSpPr>
-        <p:spPr>
-          <a:xfrm xmlns:a="http://schemas.openxmlformats.org/drawingml/2006/main">
-            <a:off x="1000125" y="4476750"/>
-            <a:ext cx="476250" cy="476250"/>
-          </a:xfrm>
-          <a:prstGeom xmlns:a="http://schemas.openxmlformats.org/drawingml/2006/main" prst="ellipse">
+                <a16:creationId xmlns:a16="http://schemas.microsoft.com/office/drawing/2014/main" id="{CD194164-C58C-40D1-8AC6-60B51824A9F6}"/>
+              </a:ext>
+            </a:extLst>
+          </p:cNvPr>
+          <p:cNvSpPr>
+            <a:spLocks xmlns:a="http://schemas.openxmlformats.org/drawingml/2006/main" noGrp="1"/>
+          </p:cNvSpPr>
+          <p:nvPr/>
+        </p:nvSpPr>
+        <p:spPr>
+          <a:xfrm xmlns:a="http://schemas.openxmlformats.org/drawingml/2006/main">
+            <a:off x="1714500" y="4181475"/>
+            <a:ext cx="9334500" cy="9525"/>
+          </a:xfrm>
+          <a:prstGeom xmlns:a="http://schemas.openxmlformats.org/drawingml/2006/main" prst="rect">
             <a:avLst/>
           </a:prstGeom>
           <a:solidFill xmlns:a="http://schemas.openxmlformats.org/drawingml/2006/main">
-            <a:srgbClr val="2C6E73"/>
+            <a:srgbClr val="D9E0E6"/>
           </a:solidFill>
           <a:ln xmlns:a="http://schemas.openxmlformats.org/drawingml/2006/main" w="0">
-            <a:noFill/>
+            <a:solidFill>
+              <a:srgbClr val="D9E0E6"/>
+            </a:solidFill>
           </a:ln>
         </p:spPr>
       </p:sp>
@@ -8729,19 +8737,19 @@
           <p:cNvPr id="21" name="">
             <a:extLst xmlns:a="http://schemas.openxmlformats.org/drawingml/2006/main">
               <a:ext uri="{FF2B5EF4-FFF2-40B4-BE49-F238E27FC236}">
-                <a16:creationId xmlns:a16="http://schemas.microsoft.com/office/drawing/2014/main" id="{E573C9F0-F7AA-428B-B55B-5B2B9436E22C}"/>
-              </a:ext>
-            </a:extLst>
-          </p:cNvPr>
-          <p:cNvSpPr>
-            <a:spLocks xmlns:a="http://schemas.openxmlformats.org/drawingml/2006/main" noGrp="1"/>
-          </p:cNvSpPr>
-          <p:nvPr/>
-        </p:nvSpPr>
-        <p:spPr>
-          <a:xfrm xmlns:a="http://schemas.openxmlformats.org/drawingml/2006/main">
-            <a:off x="1000125" y="4505325"/>
-            <a:ext cx="476250" cy="419100"/>
+                <a16:creationId xmlns:a16="http://schemas.microsoft.com/office/drawing/2014/main" id="{C4AAB59E-2478-422F-B8AA-16CCD9143A26}"/>
+              </a:ext>
+            </a:extLst>
+          </p:cNvPr>
+          <p:cNvSpPr>
+            <a:spLocks xmlns:a="http://schemas.openxmlformats.org/drawingml/2006/main" noGrp="1"/>
+          </p:cNvSpPr>
+          <p:nvPr/>
+        </p:nvSpPr>
+        <p:spPr>
+          <a:xfrm xmlns:a="http://schemas.openxmlformats.org/drawingml/2006/main">
+            <a:off x="1162050" y="4314825"/>
+            <a:ext cx="400050" cy="400050"/>
           </a:xfrm>
           <a:prstGeom xmlns:a="http://schemas.openxmlformats.org/drawingml/2006/main" prst="rect">
             <a:avLst/>
@@ -8758,9 +8766,9 @@
           <a:lstStyle xmlns:a="http://schemas.openxmlformats.org/drawingml/2006/main"/>
           <a:p xmlns:a="http://schemas.openxmlformats.org/drawingml/2006/main">
             <a:pPr algn="ctr">
-              <a:defRPr sz="1350" b="1">
-                <a:solidFill>
-                  <a:srgbClr val="FFFFFF"/>
+              <a:defRPr sz="1125" b="1">
+                <a:solidFill>
+                  <a:srgbClr val="2C6E73"/>
                 </a:solidFill>
                 <a:latin typeface="Arial"/>
                 <a:ea typeface="Arial"/>
@@ -8768,9 +8776,9 @@
               </a:defRPr>
             </a:pPr>
             <a:r>
-              <a:rPr sz="1350" b="1">
-                <a:solidFill>
-                  <a:srgbClr val="FFFFFF"/>
+              <a:rPr sz="1125" b="1">
+                <a:solidFill>
+                  <a:srgbClr val="2C6E73"/>
                 </a:solidFill>
                 <a:latin typeface="Arial"/>
                 <a:ea typeface="Arial"/>
@@ -8786,19 +8794,19 @@
           <p:cNvPr id="22" name="">
             <a:extLst xmlns:a="http://schemas.openxmlformats.org/drawingml/2006/main">
               <a:ext uri="{FF2B5EF4-FFF2-40B4-BE49-F238E27FC236}">
-                <a16:creationId xmlns:a16="http://schemas.microsoft.com/office/drawing/2014/main" id="{36771B53-AE0F-424D-A9A3-FCCFA6A8C04B}"/>
-              </a:ext>
-            </a:extLst>
-          </p:cNvPr>
-          <p:cNvSpPr>
-            <a:spLocks xmlns:a="http://schemas.openxmlformats.org/drawingml/2006/main" noGrp="1"/>
-          </p:cNvSpPr>
-          <p:nvPr/>
-        </p:nvSpPr>
-        <p:spPr>
-          <a:xfrm xmlns:a="http://schemas.openxmlformats.org/drawingml/2006/main">
-            <a:off x="1714500" y="4410075"/>
-            <a:ext cx="9429750" cy="609600"/>
+                <a16:creationId xmlns:a16="http://schemas.microsoft.com/office/drawing/2014/main" id="{9EB8EB78-8488-4239-AB5D-057173EE463B}"/>
+              </a:ext>
+            </a:extLst>
+          </p:cNvPr>
+          <p:cNvSpPr>
+            <a:spLocks xmlns:a="http://schemas.openxmlformats.org/drawingml/2006/main" noGrp="1"/>
+          </p:cNvSpPr>
+          <p:nvPr/>
+        </p:nvSpPr>
+        <p:spPr>
+          <a:xfrm xmlns:a="http://schemas.openxmlformats.org/drawingml/2006/main">
+            <a:off x="1714500" y="4229100"/>
+            <a:ext cx="9525000" cy="638175"/>
           </a:xfrm>
           <a:prstGeom xmlns:a="http://schemas.openxmlformats.org/drawingml/2006/main" prst="rect">
             <a:avLst/>
@@ -8815,9 +8823,9 @@
           <a:lstStyle xmlns:a="http://schemas.openxmlformats.org/drawingml/2006/main"/>
           <a:p xmlns:a="http://schemas.openxmlformats.org/drawingml/2006/main">
             <a:pPr algn="l">
-              <a:defRPr sz="1500" b="1">
-                <a:solidFill>
-                  <a:srgbClr val="2F785D"/>
+              <a:defRPr sz="1575" b="0">
+                <a:solidFill>
+                  <a:srgbClr val="17253A"/>
                 </a:solidFill>
                 <a:latin typeface="Arial"/>
                 <a:ea typeface="Arial"/>
@@ -8825,15 +8833,161 @@
               </a:defRPr>
             </a:pPr>
             <a:r>
-              <a:rPr sz="1500" b="1">
+              <a:rPr sz="1575" b="0">
+                <a:solidFill>
+                  <a:srgbClr val="17253A"/>
+                </a:solidFill>
+                <a:latin typeface="Arial"/>
+                <a:ea typeface="Arial"/>
+                <a:cs typeface="Arial"/>
+              </a:rPr>
+              <a:t>5,880 + 1,176 = 7,056</a:t>
+            </a:r>
+          </a:p>
+        </p:txBody>
+      </p:sp>
+      <p:sp>
+        <p:nvSpPr>
+          <p:cNvPr id="23" name="">
+            <a:extLst xmlns:a="http://schemas.openxmlformats.org/drawingml/2006/main">
+              <a:ext uri="{FF2B5EF4-FFF2-40B4-BE49-F238E27FC236}">
+                <a16:creationId xmlns:a16="http://schemas.microsoft.com/office/drawing/2014/main" id="{5838CD7D-8A91-4986-ACE8-564E2B984AAD}"/>
+              </a:ext>
+            </a:extLst>
+          </p:cNvPr>
+          <p:cNvSpPr>
+            <a:spLocks xmlns:a="http://schemas.openxmlformats.org/drawingml/2006/main" noGrp="1"/>
+          </p:cNvSpPr>
+          <p:nvPr/>
+        </p:nvSpPr>
+        <p:spPr>
+          <a:xfrm xmlns:a="http://schemas.openxmlformats.org/drawingml/2006/main">
+            <a:off x="1714500" y="4886325"/>
+            <a:ext cx="9334500" cy="9525"/>
+          </a:xfrm>
+          <a:prstGeom xmlns:a="http://schemas.openxmlformats.org/drawingml/2006/main" prst="rect">
+            <a:avLst/>
+          </a:prstGeom>
+          <a:solidFill xmlns:a="http://schemas.openxmlformats.org/drawingml/2006/main">
+            <a:srgbClr val="D9E0E6"/>
+          </a:solidFill>
+          <a:ln xmlns:a="http://schemas.openxmlformats.org/drawingml/2006/main" w="0">
+            <a:solidFill>
+              <a:srgbClr val="D9E0E6"/>
+            </a:solidFill>
+          </a:ln>
+        </p:spPr>
+      </p:sp>
+      <p:sp>
+        <p:nvSpPr>
+          <p:cNvPr id="24" name="">
+            <a:extLst xmlns:a="http://schemas.openxmlformats.org/drawingml/2006/main">
+              <a:ext uri="{FF2B5EF4-FFF2-40B4-BE49-F238E27FC236}">
+                <a16:creationId xmlns:a16="http://schemas.microsoft.com/office/drawing/2014/main" id="{04533300-C013-4946-8809-348F50C05C38}"/>
+              </a:ext>
+            </a:extLst>
+          </p:cNvPr>
+          <p:cNvSpPr>
+            <a:spLocks xmlns:a="http://schemas.openxmlformats.org/drawingml/2006/main" noGrp="1"/>
+          </p:cNvSpPr>
+          <p:nvPr/>
+        </p:nvSpPr>
+        <p:spPr>
+          <a:xfrm xmlns:a="http://schemas.openxmlformats.org/drawingml/2006/main">
+            <a:off x="1162050" y="5019675"/>
+            <a:ext cx="400050" cy="400050"/>
+          </a:xfrm>
+          <a:prstGeom xmlns:a="http://schemas.openxmlformats.org/drawingml/2006/main" prst="rect">
+            <a:avLst/>
+          </a:prstGeom>
+          <a:noFill xmlns:a="http://schemas.openxmlformats.org/drawingml/2006/main"/>
+          <a:ln xmlns:a="http://schemas.openxmlformats.org/drawingml/2006/main" w="0">
+            <a:noFill/>
+          </a:ln>
+        </p:spPr>
+        <p:txBody>
+          <a:bodyPr xmlns:a="http://schemas.openxmlformats.org/drawingml/2006/main" anchor="ctr">
+            <a:normAutofit fontScale="100000"/>
+          </a:bodyPr>
+          <a:lstStyle xmlns:a="http://schemas.openxmlformats.org/drawingml/2006/main"/>
+          <a:p xmlns:a="http://schemas.openxmlformats.org/drawingml/2006/main">
+            <a:pPr algn="ctr">
+              <a:defRPr sz="1125" b="1">
                 <a:solidFill>
                   <a:srgbClr val="2F785D"/>
                 </a:solidFill>
                 <a:latin typeface="Arial"/>
                 <a:ea typeface="Arial"/>
                 <a:cs typeface="Arial"/>
+              </a:defRPr>
+            </a:pPr>
+            <a:r>
+              <a:rPr sz="1125" b="1">
+                <a:solidFill>
+                  <a:srgbClr val="2F785D"/>
+                </a:solidFill>
+                <a:latin typeface="Arial"/>
+                <a:ea typeface="Arial"/>
+                <a:cs typeface="Arial"/>
               </a:rPr>
-              <a:t>Check the result: Check the size of the result using estimation or an inverse operation.</a:t>
+              <a:t>5</a:t>
+            </a:r>
+          </a:p>
+        </p:txBody>
+      </p:sp>
+      <p:sp>
+        <p:nvSpPr>
+          <p:cNvPr id="25" name="">
+            <a:extLst xmlns:a="http://schemas.openxmlformats.org/drawingml/2006/main">
+              <a:ext uri="{FF2B5EF4-FFF2-40B4-BE49-F238E27FC236}">
+                <a16:creationId xmlns:a16="http://schemas.microsoft.com/office/drawing/2014/main" id="{BC417371-7B11-425A-83B2-8E6A52656F2A}"/>
+              </a:ext>
+            </a:extLst>
+          </p:cNvPr>
+          <p:cNvSpPr>
+            <a:spLocks xmlns:a="http://schemas.openxmlformats.org/drawingml/2006/main" noGrp="1"/>
+          </p:cNvSpPr>
+          <p:nvPr/>
+        </p:nvSpPr>
+        <p:spPr>
+          <a:xfrm xmlns:a="http://schemas.openxmlformats.org/drawingml/2006/main">
+            <a:off x="1714500" y="4933950"/>
+            <a:ext cx="9525000" cy="638175"/>
+          </a:xfrm>
+          <a:prstGeom xmlns:a="http://schemas.openxmlformats.org/drawingml/2006/main" prst="rect">
+            <a:avLst/>
+          </a:prstGeom>
+          <a:noFill xmlns:a="http://schemas.openxmlformats.org/drawingml/2006/main"/>
+          <a:ln xmlns:a="http://schemas.openxmlformats.org/drawingml/2006/main" w="0">
+            <a:noFill/>
+          </a:ln>
+        </p:spPr>
+        <p:txBody>
+          <a:bodyPr xmlns:a="http://schemas.openxmlformats.org/drawingml/2006/main" anchor="ctr">
+            <a:normAutofit fontScale="100000"/>
+          </a:bodyPr>
+          <a:lstStyle xmlns:a="http://schemas.openxmlformats.org/drawingml/2006/main"/>
+          <a:p xmlns:a="http://schemas.openxmlformats.org/drawingml/2006/main">
+            <a:pPr algn="l">
+              <a:defRPr sz="1575" b="1">
+                <a:solidFill>
+                  <a:srgbClr val="2F785D"/>
+                </a:solidFill>
+                <a:latin typeface="Arial"/>
+                <a:ea typeface="Arial"/>
+                <a:cs typeface="Arial"/>
+              </a:defRPr>
+            </a:pPr>
+            <a:r>
+              <a:rPr sz="1575" b="1">
+                <a:solidFill>
+                  <a:srgbClr val="2F785D"/>
+                </a:solidFill>
+                <a:latin typeface="Arial"/>
+                <a:ea typeface="Arial"/>
+                <a:cs typeface="Arial"/>
+              </a:rPr>
+              <a:t>The quotient 294 is correct</a:t>
             </a:r>
           </a:p>
         </p:txBody>
@@ -8841,7 +8995,7 @@
     </p:spTree>
     <p:extLst>
       <p:ext uri="{BB962C8B-B14F-4D97-AF65-F5344CB8AC3E}">
-        <p14:creationId xmlns:p14="http://schemas.microsoft.com/office/powerpoint/2010/main" val="860908461"/>
+        <p14:creationId xmlns:p14="http://schemas.microsoft.com/office/powerpoint/2010/main" val="1036654079"/>
       </p:ext>
     </p:extLst>
   </p:cSld>
@@ -9078,6 +9232,51 @@
                       </p:childTnLst>
                     </p:cTn>
                   </p:par>
+                  <p:par>
+                    <p:cTn id="23" fill="hold">
+                      <p:stCondLst>
+                        <p:cond delay="indefinite"/>
+                      </p:stCondLst>
+                      <p:childTnLst>
+                        <p:par>
+                          <p:cTn id="24" fill="hold">
+                            <p:stCondLst>
+                              <p:cond delay="0"/>
+                            </p:stCondLst>
+                            <p:childTnLst>
+                              <p:par>
+                                <p:cTn id="25" presetID="1" presetClass="entr" presetSubtype="0" fill="hold" grpId="0" nodeType="clickEffect">
+                                  <p:stCondLst>
+                                    <p:cond delay="0"/>
+                                  </p:stCondLst>
+                                  <p:childTnLst>
+                                    <p:set>
+                                      <p:cBhvr>
+                                        <p:cTn id="26" dur="1" fill="hold">
+                                          <p:stCondLst>
+                                            <p:cond delay="0"/>
+                                          </p:stCondLst>
+                                        </p:cTn>
+                                        <p:tgtEl>
+                                          <p:spTgt spid="25"/>
+                                        </p:tgtEl>
+                                        <p:attrNameLst>
+                                          <p:attrName>style.visibility</p:attrName>
+                                        </p:attrNameLst>
+                                      </p:cBhvr>
+                                      <p:to>
+                                        <p:strVal val="visible"/>
+                                      </p:to>
+                                    </p:set>
+                                  </p:childTnLst>
+                                </p:cTn>
+                              </p:par>
+                            </p:childTnLst>
+                          </p:cTn>
+                        </p:par>
+                      </p:childTnLst>
+                    </p:cTn>
+                  </p:par>
                 </p:childTnLst>
               </p:cTn>
               <p:prevCondLst>
@@ -9105,6 +9304,7 @@
       <p:bldP spid="16" grpId="0"/>
       <p:bldP spid="19" grpId="0"/>
       <p:bldP spid="22" grpId="0"/>
+      <p:bldP spid="25" grpId="0"/>
     </p:bldLst>
   </p:timing>
 </p:sld>
@@ -9134,7 +9334,7 @@
           <p:cNvPr id="15" name="">
             <a:extLst xmlns:a="http://schemas.openxmlformats.org/drawingml/2006/main">
               <a:ext uri="{FF2B5EF4-FFF2-40B4-BE49-F238E27FC236}">
-                <a16:creationId xmlns:a16="http://schemas.microsoft.com/office/drawing/2014/main" id="{0D9BC3B1-A8DE-477E-887A-041F6ECEF74A}"/>
+                <a16:creationId xmlns:a16="http://schemas.microsoft.com/office/drawing/2014/main" id="{02175138-78BB-4205-9B14-54F6D748282B}"/>
               </a:ext>
             </a:extLst>
           </p:cNvPr>
@@ -9166,7 +9366,7 @@
           <p:cNvPr id="2" name="">
             <a:extLst xmlns:a="http://schemas.openxmlformats.org/drawingml/2006/main">
               <a:ext uri="{FF2B5EF4-FFF2-40B4-BE49-F238E27FC236}">
-                <a16:creationId xmlns:a16="http://schemas.microsoft.com/office/drawing/2014/main" id="{C571830E-FF3F-4B5A-8263-1CAF693DDBC9}"/>
+                <a16:creationId xmlns:a16="http://schemas.microsoft.com/office/drawing/2014/main" id="{4CF92393-AC5A-4034-A145-AFDB03204232}"/>
               </a:ext>
             </a:extLst>
           </p:cNvPr>
@@ -9223,7 +9423,7 @@
           <p:cNvPr id="3" name="">
             <a:extLst xmlns:a="http://schemas.openxmlformats.org/drawingml/2006/main">
               <a:ext uri="{FF2B5EF4-FFF2-40B4-BE49-F238E27FC236}">
-                <a16:creationId xmlns:a16="http://schemas.microsoft.com/office/drawing/2014/main" id="{07961402-59AE-4380-83E1-C694231C917D}"/>
+                <a16:creationId xmlns:a16="http://schemas.microsoft.com/office/drawing/2014/main" id="{31093858-F0C3-4306-9CCA-BE38E75A64A9}"/>
               </a:ext>
             </a:extLst>
           </p:cNvPr>
@@ -9255,7 +9455,7 @@
           <p:cNvPr id="4" name="">
             <a:extLst xmlns:a="http://schemas.openxmlformats.org/drawingml/2006/main">
               <a:ext uri="{FF2B5EF4-FFF2-40B4-BE49-F238E27FC236}">
-                <a16:creationId xmlns:a16="http://schemas.microsoft.com/office/drawing/2014/main" id="{4784D3F0-B871-49BA-A594-8ECD237F5173}"/>
+                <a16:creationId xmlns:a16="http://schemas.microsoft.com/office/drawing/2014/main" id="{01E2874F-2FFA-4450-B3B9-4506FD1A4554}"/>
               </a:ext>
             </a:extLst>
           </p:cNvPr>
@@ -9312,7 +9512,7 @@
           <p:cNvPr id="5" name="">
             <a:extLst xmlns:a="http://schemas.openxmlformats.org/drawingml/2006/main">
               <a:ext uri="{FF2B5EF4-FFF2-40B4-BE49-F238E27FC236}">
-                <a16:creationId xmlns:a16="http://schemas.microsoft.com/office/drawing/2014/main" id="{FC20D13C-8BB1-4BA8-A5CC-7198E6D05434}"/>
+                <a16:creationId xmlns:a16="http://schemas.microsoft.com/office/drawing/2014/main" id="{282DCC15-48F7-4D10-9D95-61DC429A5AE6}"/>
               </a:ext>
             </a:extLst>
           </p:cNvPr>
@@ -9369,7 +9569,7 @@
           <p:cNvPr id="6" name="">
             <a:extLst xmlns:a="http://schemas.openxmlformats.org/drawingml/2006/main">
               <a:ext uri="{FF2B5EF4-FFF2-40B4-BE49-F238E27FC236}">
-                <a16:creationId xmlns:a16="http://schemas.microsoft.com/office/drawing/2014/main" id="{F38352BB-1BE6-4641-A00F-174B3969E28E}"/>
+                <a16:creationId xmlns:a16="http://schemas.microsoft.com/office/drawing/2014/main" id="{E551E0ED-D452-42C7-9096-604DC7CA86A3}"/>
               </a:ext>
             </a:extLst>
           </p:cNvPr>
@@ -9426,7 +9626,7 @@
           <p:cNvPr id="7" name="">
             <a:extLst xmlns:a="http://schemas.openxmlformats.org/drawingml/2006/main">
               <a:ext uri="{FF2B5EF4-FFF2-40B4-BE49-F238E27FC236}">
-                <a16:creationId xmlns:a16="http://schemas.microsoft.com/office/drawing/2014/main" id="{489BFC4A-B8AD-4E1A-94EC-26D685F89138}"/>
+                <a16:creationId xmlns:a16="http://schemas.microsoft.com/office/drawing/2014/main" id="{8F9EEFCB-68AF-44F7-B6B8-3C033F511ADB}"/>
               </a:ext>
             </a:extLst>
           </p:cNvPr>
@@ -9458,7 +9658,7 @@
           <p:cNvPr id="8" name="">
             <a:extLst xmlns:a="http://schemas.openxmlformats.org/drawingml/2006/main">
               <a:ext uri="{FF2B5EF4-FFF2-40B4-BE49-F238E27FC236}">
-                <a16:creationId xmlns:a16="http://schemas.microsoft.com/office/drawing/2014/main" id="{9D6CF04B-0CBB-492F-AC64-651EDB40FE43}"/>
+                <a16:creationId xmlns:a16="http://schemas.microsoft.com/office/drawing/2014/main" id="{F0700E0C-AC6A-4C57-BFA9-0FAF4062752C}"/>
               </a:ext>
             </a:extLst>
           </p:cNvPr>
@@ -9515,7 +9715,7 @@
           <p:cNvPr id="9" name="">
             <a:extLst xmlns:a="http://schemas.openxmlformats.org/drawingml/2006/main">
               <a:ext uri="{FF2B5EF4-FFF2-40B4-BE49-F238E27FC236}">
-                <a16:creationId xmlns:a16="http://schemas.microsoft.com/office/drawing/2014/main" id="{43EDD264-7A4F-4FAD-8DDF-F79FC02D89A5}"/>
+                <a16:creationId xmlns:a16="http://schemas.microsoft.com/office/drawing/2014/main" id="{80567CC0-B0F3-4E08-9258-B188B949E2B4}"/>
               </a:ext>
             </a:extLst>
           </p:cNvPr>
@@ -9572,7 +9772,7 @@
           <p:cNvPr id="10" name="">
             <a:extLst xmlns:a="http://schemas.openxmlformats.org/drawingml/2006/main">
               <a:ext uri="{FF2B5EF4-FFF2-40B4-BE49-F238E27FC236}">
-                <a16:creationId xmlns:a16="http://schemas.microsoft.com/office/drawing/2014/main" id="{90E94CF2-F202-42D0-BBCE-19637D74271D}"/>
+                <a16:creationId xmlns:a16="http://schemas.microsoft.com/office/drawing/2014/main" id="{10CF8E3F-546F-4806-BCC7-CFC20CEA47FB}"/>
               </a:ext>
             </a:extLst>
           </p:cNvPr>
@@ -9629,7 +9829,7 @@
           <p:cNvPr id="11" name="">
             <a:extLst xmlns:a="http://schemas.openxmlformats.org/drawingml/2006/main">
               <a:ext uri="{FF2B5EF4-FFF2-40B4-BE49-F238E27FC236}">
-                <a16:creationId xmlns:a16="http://schemas.microsoft.com/office/drawing/2014/main" id="{8D7CAB03-F086-41D4-84C4-90B8EEB6F256}"/>
+                <a16:creationId xmlns:a16="http://schemas.microsoft.com/office/drawing/2014/main" id="{3C0989FA-FE58-465F-A30F-0D2BA46DB751}"/>
               </a:ext>
             </a:extLst>
           </p:cNvPr>
@@ -9686,7 +9886,7 @@
           <p:cNvPr id="12" name="">
             <a:extLst xmlns:a="http://schemas.openxmlformats.org/drawingml/2006/main">
               <a:ext uri="{FF2B5EF4-FFF2-40B4-BE49-F238E27FC236}">
-                <a16:creationId xmlns:a16="http://schemas.microsoft.com/office/drawing/2014/main" id="{A29B528B-5A85-4284-BB68-5C50C1D748A1}"/>
+                <a16:creationId xmlns:a16="http://schemas.microsoft.com/office/drawing/2014/main" id="{093CEC51-0CA9-485D-A51F-2FA56B5A0FFC}"/>
               </a:ext>
             </a:extLst>
           </p:cNvPr>
@@ -9718,7 +9918,7 @@
           <p:cNvPr id="13" name="">
             <a:extLst xmlns:a="http://schemas.openxmlformats.org/drawingml/2006/main">
               <a:ext uri="{FF2B5EF4-FFF2-40B4-BE49-F238E27FC236}">
-                <a16:creationId xmlns:a16="http://schemas.microsoft.com/office/drawing/2014/main" id="{C09B8398-3F9E-457F-B383-372548EE49C7}"/>
+                <a16:creationId xmlns:a16="http://schemas.microsoft.com/office/drawing/2014/main" id="{50E28D5D-3FC5-4A61-8263-408E547C9DFD}"/>
               </a:ext>
             </a:extLst>
           </p:cNvPr>
@@ -9775,7 +9975,7 @@
           <p:cNvPr id="14" name="">
             <a:extLst xmlns:a="http://schemas.openxmlformats.org/drawingml/2006/main">
               <a:ext uri="{FF2B5EF4-FFF2-40B4-BE49-F238E27FC236}">
-                <a16:creationId xmlns:a16="http://schemas.microsoft.com/office/drawing/2014/main" id="{F5F6F8D8-2843-4A60-9184-E813DA618C7B}"/>
+                <a16:creationId xmlns:a16="http://schemas.microsoft.com/office/drawing/2014/main" id="{DD6F7C05-2B72-4C61-B68B-ED258599B9B1}"/>
               </a:ext>
             </a:extLst>
           </p:cNvPr>
@@ -9830,7 +10030,7 @@
     </p:spTree>
     <p:extLst>
       <p:ext uri="{BB962C8B-B14F-4D97-AF65-F5344CB8AC3E}">
-        <p14:creationId xmlns:p14="http://schemas.microsoft.com/office/powerpoint/2010/main" val="701528573"/>
+        <p14:creationId xmlns:p14="http://schemas.microsoft.com/office/powerpoint/2010/main" val="1623892623"/>
       </p:ext>
     </p:extLst>
   </p:cSld>
@@ -10031,7 +10231,7 @@
           <p:cNvPr id="16" name="">
             <a:extLst xmlns:a="http://schemas.openxmlformats.org/drawingml/2006/main">
               <a:ext uri="{FF2B5EF4-FFF2-40B4-BE49-F238E27FC236}">
-                <a16:creationId xmlns:a16="http://schemas.microsoft.com/office/drawing/2014/main" id="{E5D47DCE-3E2C-4E7E-BCEE-D05F3E3D6F2A}"/>
+                <a16:creationId xmlns:a16="http://schemas.microsoft.com/office/drawing/2014/main" id="{3E014DFA-A7A0-4D12-93BA-002D63056927}"/>
               </a:ext>
             </a:extLst>
           </p:cNvPr>
@@ -10063,7 +10263,7 @@
           <p:cNvPr id="2" name="">
             <a:extLst xmlns:a="http://schemas.openxmlformats.org/drawingml/2006/main">
               <a:ext uri="{FF2B5EF4-FFF2-40B4-BE49-F238E27FC236}">
-                <a16:creationId xmlns:a16="http://schemas.microsoft.com/office/drawing/2014/main" id="{A8B090DE-2287-40D2-9580-168BBBDFCDB7}"/>
+                <a16:creationId xmlns:a16="http://schemas.microsoft.com/office/drawing/2014/main" id="{FEB8A4C4-28C0-4BAA-A65B-5D1E3103657F}"/>
               </a:ext>
             </a:extLst>
           </p:cNvPr>
@@ -10120,7 +10320,7 @@
           <p:cNvPr id="3" name="">
             <a:extLst xmlns:a="http://schemas.openxmlformats.org/drawingml/2006/main">
               <a:ext uri="{FF2B5EF4-FFF2-40B4-BE49-F238E27FC236}">
-                <a16:creationId xmlns:a16="http://schemas.microsoft.com/office/drawing/2014/main" id="{5F73D3AE-5173-4F0E-B10F-E2EADF395E02}"/>
+                <a16:creationId xmlns:a16="http://schemas.microsoft.com/office/drawing/2014/main" id="{CBF409BC-BF30-490E-999E-7E5F0C791438}"/>
               </a:ext>
             </a:extLst>
           </p:cNvPr>
@@ -10152,7 +10352,7 @@
           <p:cNvPr id="4" name="">
             <a:extLst xmlns:a="http://schemas.openxmlformats.org/drawingml/2006/main">
               <a:ext uri="{FF2B5EF4-FFF2-40B4-BE49-F238E27FC236}">
-                <a16:creationId xmlns:a16="http://schemas.microsoft.com/office/drawing/2014/main" id="{BD2C7F1F-D052-4771-9AB9-F135908B19F1}"/>
+                <a16:creationId xmlns:a16="http://schemas.microsoft.com/office/drawing/2014/main" id="{6ACD49CD-22D3-4118-A224-F5D036B74DD1}"/>
               </a:ext>
             </a:extLst>
           </p:cNvPr>
@@ -10209,7 +10409,7 @@
           <p:cNvPr id="5" name="">
             <a:extLst xmlns:a="http://schemas.openxmlformats.org/drawingml/2006/main">
               <a:ext uri="{FF2B5EF4-FFF2-40B4-BE49-F238E27FC236}">
-                <a16:creationId xmlns:a16="http://schemas.microsoft.com/office/drawing/2014/main" id="{A39395DE-1855-4925-9C93-AEFD20C5D060}"/>
+                <a16:creationId xmlns:a16="http://schemas.microsoft.com/office/drawing/2014/main" id="{C16FC95A-7A44-40B3-A71F-FA267107049D}"/>
               </a:ext>
             </a:extLst>
           </p:cNvPr>
@@ -10266,7 +10466,7 @@
           <p:cNvPr id="6" name="">
             <a:extLst xmlns:a="http://schemas.openxmlformats.org/drawingml/2006/main">
               <a:ext uri="{FF2B5EF4-FFF2-40B4-BE49-F238E27FC236}">
-                <a16:creationId xmlns:a16="http://schemas.microsoft.com/office/drawing/2014/main" id="{5BF96B6F-3033-4E38-934A-C5B1B50B83FA}"/>
+                <a16:creationId xmlns:a16="http://schemas.microsoft.com/office/drawing/2014/main" id="{D53248A3-9012-4AB6-B5D2-17D153D3C8B6}"/>
               </a:ext>
             </a:extLst>
           </p:cNvPr>
@@ -10323,7 +10523,7 @@
           <p:cNvPr id="7" name="">
             <a:extLst xmlns:a="http://schemas.openxmlformats.org/drawingml/2006/main">
               <a:ext uri="{FF2B5EF4-FFF2-40B4-BE49-F238E27FC236}">
-                <a16:creationId xmlns:a16="http://schemas.microsoft.com/office/drawing/2014/main" id="{83E67113-47FF-43EB-A6B1-B53E3E9A81B7}"/>
+                <a16:creationId xmlns:a16="http://schemas.microsoft.com/office/drawing/2014/main" id="{17675B4B-A022-40C5-8748-60177496622D}"/>
               </a:ext>
             </a:extLst>
           </p:cNvPr>
@@ -10355,7 +10555,7 @@
           <p:cNvPr id="8" name="">
             <a:extLst xmlns:a="http://schemas.openxmlformats.org/drawingml/2006/main">
               <a:ext uri="{FF2B5EF4-FFF2-40B4-BE49-F238E27FC236}">
-                <a16:creationId xmlns:a16="http://schemas.microsoft.com/office/drawing/2014/main" id="{E25A0396-B782-45C9-AD87-9961A1368B02}"/>
+                <a16:creationId xmlns:a16="http://schemas.microsoft.com/office/drawing/2014/main" id="{7807F893-816B-443F-B3C6-A6D1A0789AC3}"/>
               </a:ext>
             </a:extLst>
           </p:cNvPr>
@@ -10412,7 +10612,7 @@
           <p:cNvPr id="9" name="">
             <a:extLst xmlns:a="http://schemas.openxmlformats.org/drawingml/2006/main">
               <a:ext uri="{FF2B5EF4-FFF2-40B4-BE49-F238E27FC236}">
-                <a16:creationId xmlns:a16="http://schemas.microsoft.com/office/drawing/2014/main" id="{48B6E859-B49A-4FD3-B2BC-37A87FE618EC}"/>
+                <a16:creationId xmlns:a16="http://schemas.microsoft.com/office/drawing/2014/main" id="{57A26D52-1383-4AD2-9FC8-606D2E52592A}"/>
               </a:ext>
             </a:extLst>
           </p:cNvPr>
@@ -10469,7 +10669,7 @@
           <p:cNvPr id="10" name="">
             <a:extLst xmlns:a="http://schemas.openxmlformats.org/drawingml/2006/main">
               <a:ext uri="{FF2B5EF4-FFF2-40B4-BE49-F238E27FC236}">
-                <a16:creationId xmlns:a16="http://schemas.microsoft.com/office/drawing/2014/main" id="{1AF9B77F-87C4-4235-82EF-E9ED9A438A44}"/>
+                <a16:creationId xmlns:a16="http://schemas.microsoft.com/office/drawing/2014/main" id="{3A2D7799-395E-4886-9481-882B143DE517}"/>
               </a:ext>
             </a:extLst>
           </p:cNvPr>
@@ -10526,7 +10726,7 @@
           <p:cNvPr id="11" name="">
             <a:extLst xmlns:a="http://schemas.openxmlformats.org/drawingml/2006/main">
               <a:ext uri="{FF2B5EF4-FFF2-40B4-BE49-F238E27FC236}">
-                <a16:creationId xmlns:a16="http://schemas.microsoft.com/office/drawing/2014/main" id="{B74AE986-CBEF-4171-AEE1-CA29EB88F40B}"/>
+                <a16:creationId xmlns:a16="http://schemas.microsoft.com/office/drawing/2014/main" id="{CD5035F2-6928-4060-B9B0-777E0F0D1028}"/>
               </a:ext>
             </a:extLst>
           </p:cNvPr>
@@ -10583,7 +10783,7 @@
           <p:cNvPr id="12" name="">
             <a:extLst xmlns:a="http://schemas.openxmlformats.org/drawingml/2006/main">
               <a:ext uri="{FF2B5EF4-FFF2-40B4-BE49-F238E27FC236}">
-                <a16:creationId xmlns:a16="http://schemas.microsoft.com/office/drawing/2014/main" id="{11FAD5AD-9ED7-4D73-B8F7-A20104D5E479}"/>
+                <a16:creationId xmlns:a16="http://schemas.microsoft.com/office/drawing/2014/main" id="{73CC993B-ADE9-40D7-A581-B9A6715E115A}"/>
               </a:ext>
             </a:extLst>
           </p:cNvPr>
@@ -10640,7 +10840,7 @@
           <p:cNvPr id="13" name="">
             <a:extLst xmlns:a="http://schemas.openxmlformats.org/drawingml/2006/main">
               <a:ext uri="{FF2B5EF4-FFF2-40B4-BE49-F238E27FC236}">
-                <a16:creationId xmlns:a16="http://schemas.microsoft.com/office/drawing/2014/main" id="{8969417C-EBC2-42B3-81CB-F760FE3DCD49}"/>
+                <a16:creationId xmlns:a16="http://schemas.microsoft.com/office/drawing/2014/main" id="{726B558A-5F2C-47CC-B592-916C6877F932}"/>
               </a:ext>
             </a:extLst>
           </p:cNvPr>
@@ -10697,7 +10897,7 @@
           <p:cNvPr id="14" name="">
             <a:extLst xmlns:a="http://schemas.openxmlformats.org/drawingml/2006/main">
               <a:ext uri="{FF2B5EF4-FFF2-40B4-BE49-F238E27FC236}">
-                <a16:creationId xmlns:a16="http://schemas.microsoft.com/office/drawing/2014/main" id="{46168C8E-D02A-40CC-B297-6B62E31E04DB}"/>
+                <a16:creationId xmlns:a16="http://schemas.microsoft.com/office/drawing/2014/main" id="{9C1ACF79-6B45-4B6E-826A-8318307570D9}"/>
               </a:ext>
             </a:extLst>
           </p:cNvPr>
@@ -10754,7 +10954,7 @@
           <p:cNvPr id="15" name="">
             <a:extLst xmlns:a="http://schemas.openxmlformats.org/drawingml/2006/main">
               <a:ext uri="{FF2B5EF4-FFF2-40B4-BE49-F238E27FC236}">
-                <a16:creationId xmlns:a16="http://schemas.microsoft.com/office/drawing/2014/main" id="{8A390570-77B0-4847-AC65-A1F78089E931}"/>
+                <a16:creationId xmlns:a16="http://schemas.microsoft.com/office/drawing/2014/main" id="{FCE8A9BE-2007-4CF8-8C43-77AE7D447B14}"/>
               </a:ext>
             </a:extLst>
           </p:cNvPr>
@@ -10809,7 +11009,7 @@
     </p:spTree>
     <p:extLst>
       <p:ext uri="{BB962C8B-B14F-4D97-AF65-F5344CB8AC3E}">
-        <p14:creationId xmlns:p14="http://schemas.microsoft.com/office/powerpoint/2010/main" val="195959074"/>
+        <p14:creationId xmlns:p14="http://schemas.microsoft.com/office/powerpoint/2010/main" val="83128243"/>
       </p:ext>
     </p:extLst>
   </p:cSld>
@@ -10964,7 +11164,7 @@
           <p:cNvPr id="16" name="">
             <a:extLst xmlns:a="http://schemas.openxmlformats.org/drawingml/2006/main">
               <a:ext uri="{FF2B5EF4-FFF2-40B4-BE49-F238E27FC236}">
-                <a16:creationId xmlns:a16="http://schemas.microsoft.com/office/drawing/2014/main" id="{583FC991-43AD-4056-9262-B884ABDF232E}"/>
+                <a16:creationId xmlns:a16="http://schemas.microsoft.com/office/drawing/2014/main" id="{29EE82C4-91E0-45B3-86A0-F6F488D380D5}"/>
               </a:ext>
             </a:extLst>
           </p:cNvPr>
@@ -10996,7 +11196,7 @@
           <p:cNvPr id="2" name="">
             <a:extLst xmlns:a="http://schemas.openxmlformats.org/drawingml/2006/main">
               <a:ext uri="{FF2B5EF4-FFF2-40B4-BE49-F238E27FC236}">
-                <a16:creationId xmlns:a16="http://schemas.microsoft.com/office/drawing/2014/main" id="{6883B5DE-1454-42BA-9B66-C9BDC05ED772}"/>
+                <a16:creationId xmlns:a16="http://schemas.microsoft.com/office/drawing/2014/main" id="{23078E36-8CED-48BB-9226-198A983822AE}"/>
               </a:ext>
             </a:extLst>
           </p:cNvPr>
@@ -11053,7 +11253,7 @@
           <p:cNvPr id="3" name="">
             <a:extLst xmlns:a="http://schemas.openxmlformats.org/drawingml/2006/main">
               <a:ext uri="{FF2B5EF4-FFF2-40B4-BE49-F238E27FC236}">
-                <a16:creationId xmlns:a16="http://schemas.microsoft.com/office/drawing/2014/main" id="{4BBDADBB-2FA6-4677-AB29-ED3A0AF35B57}"/>
+                <a16:creationId xmlns:a16="http://schemas.microsoft.com/office/drawing/2014/main" id="{D3EF020C-2F12-4F3D-9958-F263438A42EB}"/>
               </a:ext>
             </a:extLst>
           </p:cNvPr>
@@ -11085,7 +11285,7 @@
           <p:cNvPr id="4" name="">
             <a:extLst xmlns:a="http://schemas.openxmlformats.org/drawingml/2006/main">
               <a:ext uri="{FF2B5EF4-FFF2-40B4-BE49-F238E27FC236}">
-                <a16:creationId xmlns:a16="http://schemas.microsoft.com/office/drawing/2014/main" id="{215A610F-4CB0-4591-9BAF-244DD6C73E69}"/>
+                <a16:creationId xmlns:a16="http://schemas.microsoft.com/office/drawing/2014/main" id="{8F53D843-85D0-4171-A39A-0FEB81BA2F32}"/>
               </a:ext>
             </a:extLst>
           </p:cNvPr>
@@ -11142,7 +11342,7 @@
           <p:cNvPr id="5" name="">
             <a:extLst xmlns:a="http://schemas.openxmlformats.org/drawingml/2006/main">
               <a:ext uri="{FF2B5EF4-FFF2-40B4-BE49-F238E27FC236}">
-                <a16:creationId xmlns:a16="http://schemas.microsoft.com/office/drawing/2014/main" id="{8D232A82-D5DF-4359-B11A-F01F1913463C}"/>
+                <a16:creationId xmlns:a16="http://schemas.microsoft.com/office/drawing/2014/main" id="{3E369887-13AC-4355-90C9-0980F1DDC730}"/>
               </a:ext>
             </a:extLst>
           </p:cNvPr>
@@ -11199,7 +11399,7 @@
           <p:cNvPr id="6" name="">
             <a:extLst xmlns:a="http://schemas.openxmlformats.org/drawingml/2006/main">
               <a:ext uri="{FF2B5EF4-FFF2-40B4-BE49-F238E27FC236}">
-                <a16:creationId xmlns:a16="http://schemas.microsoft.com/office/drawing/2014/main" id="{166E14E2-3456-4FCF-9B00-9A9648CB4DC1}"/>
+                <a16:creationId xmlns:a16="http://schemas.microsoft.com/office/drawing/2014/main" id="{10B68F3B-A5FB-49E3-A7AA-1A5ED456117A}"/>
               </a:ext>
             </a:extLst>
           </p:cNvPr>
@@ -11256,7 +11456,7 @@
           <p:cNvPr id="7" name="">
             <a:extLst xmlns:a="http://schemas.openxmlformats.org/drawingml/2006/main">
               <a:ext uri="{FF2B5EF4-FFF2-40B4-BE49-F238E27FC236}">
-                <a16:creationId xmlns:a16="http://schemas.microsoft.com/office/drawing/2014/main" id="{4EEE7674-E4CC-4594-8669-5495C3CA12AD}"/>
+                <a16:creationId xmlns:a16="http://schemas.microsoft.com/office/drawing/2014/main" id="{F654C51C-6DAE-427B-AC7B-C8FD5B07C5E6}"/>
               </a:ext>
             </a:extLst>
           </p:cNvPr>
@@ -11288,7 +11488,7 @@
           <p:cNvPr id="8" name="">
             <a:extLst xmlns:a="http://schemas.openxmlformats.org/drawingml/2006/main">
               <a:ext uri="{FF2B5EF4-FFF2-40B4-BE49-F238E27FC236}">
-                <a16:creationId xmlns:a16="http://schemas.microsoft.com/office/drawing/2014/main" id="{DDFAF0B8-391B-4CCF-BAD3-6220C7BC161C}"/>
+                <a16:creationId xmlns:a16="http://schemas.microsoft.com/office/drawing/2014/main" id="{5A0566B4-C9C2-4DDC-B034-8E8770181F67}"/>
               </a:ext>
             </a:extLst>
           </p:cNvPr>
@@ -11345,7 +11545,7 @@
           <p:cNvPr id="9" name="">
             <a:extLst xmlns:a="http://schemas.openxmlformats.org/drawingml/2006/main">
               <a:ext uri="{FF2B5EF4-FFF2-40B4-BE49-F238E27FC236}">
-                <a16:creationId xmlns:a16="http://schemas.microsoft.com/office/drawing/2014/main" id="{8D0B506C-658F-4B13-AAFB-52A18141721C}"/>
+                <a16:creationId xmlns:a16="http://schemas.microsoft.com/office/drawing/2014/main" id="{CBA94B69-5B35-4256-82D0-7B975F0ACF8A}"/>
               </a:ext>
             </a:extLst>
           </p:cNvPr>
@@ -11406,7 +11606,7 @@
           <p:nvPr/>
         </p:nvPicPr>
         <p:blipFill>
-          <a:blip xmlns:r="http://schemas.openxmlformats.org/officeDocument/2006/relationships" xmlns:a="http://schemas.openxmlformats.org/drawingml/2006/main" r:embed="Re0bf56abfe4d428d"/>
+          <a:blip xmlns:r="http://schemas.openxmlformats.org/officeDocument/2006/relationships" xmlns:a="http://schemas.openxmlformats.org/drawingml/2006/main" r:embed="R25aa8ec2c71347ea"/>
           <a:stretch xmlns:a="http://schemas.openxmlformats.org/drawingml/2006/main"/>
         </p:blipFill>
         <p:spPr>
@@ -11424,7 +11624,7 @@
           <p:cNvPr id="11" name="">
             <a:extLst xmlns:a="http://schemas.openxmlformats.org/drawingml/2006/main">
               <a:ext uri="{FF2B5EF4-FFF2-40B4-BE49-F238E27FC236}">
-                <a16:creationId xmlns:a16="http://schemas.microsoft.com/office/drawing/2014/main" id="{F0FFD6DA-6BEB-45B4-82D6-7D79657B5372}"/>
+                <a16:creationId xmlns:a16="http://schemas.microsoft.com/office/drawing/2014/main" id="{E4949173-FEDA-4B0F-A157-50D1B720E1D8}"/>
               </a:ext>
             </a:extLst>
           </p:cNvPr>
@@ -11481,7 +11681,7 @@
           <p:cNvPr id="12" name="">
             <a:extLst xmlns:a="http://schemas.openxmlformats.org/drawingml/2006/main">
               <a:ext uri="{FF2B5EF4-FFF2-40B4-BE49-F238E27FC236}">
-                <a16:creationId xmlns:a16="http://schemas.microsoft.com/office/drawing/2014/main" id="{EC8B7E42-61DE-4CF4-A2E7-65E763C3657B}"/>
+                <a16:creationId xmlns:a16="http://schemas.microsoft.com/office/drawing/2014/main" id="{1FE69581-E4E3-42D0-82E0-7F4771FE2D4A}"/>
               </a:ext>
             </a:extLst>
           </p:cNvPr>
@@ -11538,7 +11738,7 @@
           <p:cNvPr id="13" name="">
             <a:extLst xmlns:a="http://schemas.openxmlformats.org/drawingml/2006/main">
               <a:ext uri="{FF2B5EF4-FFF2-40B4-BE49-F238E27FC236}">
-                <a16:creationId xmlns:a16="http://schemas.microsoft.com/office/drawing/2014/main" id="{44B209ED-A970-4B83-B6EE-43202F654395}"/>
+                <a16:creationId xmlns:a16="http://schemas.microsoft.com/office/drawing/2014/main" id="{78E806ED-A49A-4E37-A3B2-13A88E551D40}"/>
               </a:ext>
             </a:extLst>
           </p:cNvPr>
@@ -11570,7 +11770,7 @@
           <p:cNvPr id="14" name="">
             <a:extLst xmlns:a="http://schemas.openxmlformats.org/drawingml/2006/main">
               <a:ext uri="{FF2B5EF4-FFF2-40B4-BE49-F238E27FC236}">
-                <a16:creationId xmlns:a16="http://schemas.microsoft.com/office/drawing/2014/main" id="{7D7A0866-AB34-454C-8D53-57E6179F7260}"/>
+                <a16:creationId xmlns:a16="http://schemas.microsoft.com/office/drawing/2014/main" id="{2A0946EA-36C0-448E-9636-383DE7E2529F}"/>
               </a:ext>
             </a:extLst>
           </p:cNvPr>
@@ -11627,7 +11827,7 @@
           <p:cNvPr id="15" name="">
             <a:extLst xmlns:a="http://schemas.openxmlformats.org/drawingml/2006/main">
               <a:ext uri="{FF2B5EF4-FFF2-40B4-BE49-F238E27FC236}">
-                <a16:creationId xmlns:a16="http://schemas.microsoft.com/office/drawing/2014/main" id="{D27D2BF7-BD0D-45F6-8DE0-6836EDA15585}"/>
+                <a16:creationId xmlns:a16="http://schemas.microsoft.com/office/drawing/2014/main" id="{5A2588E0-2746-4FCD-8B7A-7CC56F0EB9C9}"/>
               </a:ext>
             </a:extLst>
           </p:cNvPr>
@@ -11682,7 +11882,7 @@
     </p:spTree>
     <p:extLst>
       <p:ext uri="{BB962C8B-B14F-4D97-AF65-F5344CB8AC3E}">
-        <p14:creationId xmlns:p14="http://schemas.microsoft.com/office/powerpoint/2010/main" val="1941761954"/>
+        <p14:creationId xmlns:p14="http://schemas.microsoft.com/office/powerpoint/2010/main" val="1487146104"/>
       </p:ext>
     </p:extLst>
   </p:cSld>
@@ -11837,7 +12037,7 @@
           <p:cNvPr id="23" name="">
             <a:extLst xmlns:a="http://schemas.openxmlformats.org/drawingml/2006/main">
               <a:ext uri="{FF2B5EF4-FFF2-40B4-BE49-F238E27FC236}">
-                <a16:creationId xmlns:a16="http://schemas.microsoft.com/office/drawing/2014/main" id="{DD71B86E-594C-481D-9DEC-F9F68379FDAC}"/>
+                <a16:creationId xmlns:a16="http://schemas.microsoft.com/office/drawing/2014/main" id="{E34DEEAD-0825-4949-9DE8-8E54C4317EF7}"/>
               </a:ext>
             </a:extLst>
           </p:cNvPr>
@@ -11869,7 +12069,7 @@
           <p:cNvPr id="2" name="">
             <a:extLst xmlns:a="http://schemas.openxmlformats.org/drawingml/2006/main">
               <a:ext uri="{FF2B5EF4-FFF2-40B4-BE49-F238E27FC236}">
-                <a16:creationId xmlns:a16="http://schemas.microsoft.com/office/drawing/2014/main" id="{071C577E-B2C9-464E-A650-BB2F72888B09}"/>
+                <a16:creationId xmlns:a16="http://schemas.microsoft.com/office/drawing/2014/main" id="{22A53C82-63ED-413A-9804-E68B1061C424}"/>
               </a:ext>
             </a:extLst>
           </p:cNvPr>
@@ -11926,7 +12126,7 @@
           <p:cNvPr id="3" name="">
             <a:extLst xmlns:a="http://schemas.openxmlformats.org/drawingml/2006/main">
               <a:ext uri="{FF2B5EF4-FFF2-40B4-BE49-F238E27FC236}">
-                <a16:creationId xmlns:a16="http://schemas.microsoft.com/office/drawing/2014/main" id="{A8D660E6-4A62-49CB-941F-05AF45CE3788}"/>
+                <a16:creationId xmlns:a16="http://schemas.microsoft.com/office/drawing/2014/main" id="{32970B5D-B459-4221-BB99-E689D9D71544}"/>
               </a:ext>
             </a:extLst>
           </p:cNvPr>
@@ -11958,7 +12158,7 @@
           <p:cNvPr id="4" name="">
             <a:extLst xmlns:a="http://schemas.openxmlformats.org/drawingml/2006/main">
               <a:ext uri="{FF2B5EF4-FFF2-40B4-BE49-F238E27FC236}">
-                <a16:creationId xmlns:a16="http://schemas.microsoft.com/office/drawing/2014/main" id="{5D3EAF62-0B10-4CA8-B626-C3A20035E934}"/>
+                <a16:creationId xmlns:a16="http://schemas.microsoft.com/office/drawing/2014/main" id="{5A9A1CDB-09CF-4A09-99C2-F59F3BB9C7D3}"/>
               </a:ext>
             </a:extLst>
           </p:cNvPr>
@@ -12015,7 +12215,7 @@
           <p:cNvPr id="5" name="">
             <a:extLst xmlns:a="http://schemas.openxmlformats.org/drawingml/2006/main">
               <a:ext uri="{FF2B5EF4-FFF2-40B4-BE49-F238E27FC236}">
-                <a16:creationId xmlns:a16="http://schemas.microsoft.com/office/drawing/2014/main" id="{30F306DA-F1AC-4EBD-AE83-312F38A3DDE5}"/>
+                <a16:creationId xmlns:a16="http://schemas.microsoft.com/office/drawing/2014/main" id="{DFF798DD-DCE5-455E-B2A7-747820E0C8CF}"/>
               </a:ext>
             </a:extLst>
           </p:cNvPr>
@@ -12072,7 +12272,7 @@
           <p:cNvPr id="6" name="">
             <a:extLst xmlns:a="http://schemas.openxmlformats.org/drawingml/2006/main">
               <a:ext uri="{FF2B5EF4-FFF2-40B4-BE49-F238E27FC236}">
-                <a16:creationId xmlns:a16="http://schemas.microsoft.com/office/drawing/2014/main" id="{71E36853-927B-4B1C-B1F8-FD7EECAA10F8}"/>
+                <a16:creationId xmlns:a16="http://schemas.microsoft.com/office/drawing/2014/main" id="{4FB236BD-EBBB-4F6E-A7F1-2D4F818EAD44}"/>
               </a:ext>
             </a:extLst>
           </p:cNvPr>
@@ -12129,7 +12329,7 @@
           <p:cNvPr id="7" name="">
             <a:extLst xmlns:a="http://schemas.openxmlformats.org/drawingml/2006/main">
               <a:ext uri="{FF2B5EF4-FFF2-40B4-BE49-F238E27FC236}">
-                <a16:creationId xmlns:a16="http://schemas.microsoft.com/office/drawing/2014/main" id="{D1EE1D58-FD8E-4BE7-B5BF-92C756B1603D}"/>
+                <a16:creationId xmlns:a16="http://schemas.microsoft.com/office/drawing/2014/main" id="{83E170A9-565D-4505-8A69-B75275B42E55}"/>
               </a:ext>
             </a:extLst>
           </p:cNvPr>
@@ -12161,7 +12361,7 @@
           <p:cNvPr id="8" name="">
             <a:extLst xmlns:a="http://schemas.openxmlformats.org/drawingml/2006/main">
               <a:ext uri="{FF2B5EF4-FFF2-40B4-BE49-F238E27FC236}">
-                <a16:creationId xmlns:a16="http://schemas.microsoft.com/office/drawing/2014/main" id="{92F1579C-D2BD-463F-A779-2B7C5332316F}"/>
+                <a16:creationId xmlns:a16="http://schemas.microsoft.com/office/drawing/2014/main" id="{D30F22C4-7413-4358-9C5F-E186AC45F8F7}"/>
               </a:ext>
             </a:extLst>
           </p:cNvPr>
@@ -12218,7 +12418,7 @@
           <p:cNvPr id="9" name="">
             <a:extLst xmlns:a="http://schemas.openxmlformats.org/drawingml/2006/main">
               <a:ext uri="{FF2B5EF4-FFF2-40B4-BE49-F238E27FC236}">
-                <a16:creationId xmlns:a16="http://schemas.microsoft.com/office/drawing/2014/main" id="{BE500262-D9D9-458C-9396-FC6629D832B8}"/>
+                <a16:creationId xmlns:a16="http://schemas.microsoft.com/office/drawing/2014/main" id="{77A12B5A-711B-4138-98D3-E08A117642E0}"/>
               </a:ext>
             </a:extLst>
           </p:cNvPr>
@@ -12275,7 +12475,7 @@
           <p:cNvPr id="10" name="">
             <a:extLst xmlns:a="http://schemas.openxmlformats.org/drawingml/2006/main">
               <a:ext uri="{FF2B5EF4-FFF2-40B4-BE49-F238E27FC236}">
-                <a16:creationId xmlns:a16="http://schemas.microsoft.com/office/drawing/2014/main" id="{B9BA17E4-315B-43A4-8DE8-28520B86F776}"/>
+                <a16:creationId xmlns:a16="http://schemas.microsoft.com/office/drawing/2014/main" id="{6021DCF4-E14F-43F7-BBD0-B83E3B9EE220}"/>
               </a:ext>
             </a:extLst>
           </p:cNvPr>
@@ -12309,7 +12509,7 @@
           <p:cNvPr id="11" name="">
             <a:extLst xmlns:a="http://schemas.openxmlformats.org/drawingml/2006/main">
               <a:ext uri="{FF2B5EF4-FFF2-40B4-BE49-F238E27FC236}">
-                <a16:creationId xmlns:a16="http://schemas.microsoft.com/office/drawing/2014/main" id="{AB2DFE34-0322-44E1-8DD2-9B00255991AA}"/>
+                <a16:creationId xmlns:a16="http://schemas.microsoft.com/office/drawing/2014/main" id="{112523D5-CEFA-43B6-9162-A6D812F35CF8}"/>
               </a:ext>
             </a:extLst>
           </p:cNvPr>
@@ -12341,7 +12541,7 @@
           <p:cNvPr id="12" name="">
             <a:extLst xmlns:a="http://schemas.openxmlformats.org/drawingml/2006/main">
               <a:ext uri="{FF2B5EF4-FFF2-40B4-BE49-F238E27FC236}">
-                <a16:creationId xmlns:a16="http://schemas.microsoft.com/office/drawing/2014/main" id="{574B026C-F5E0-4E50-B8E5-90469EA300F2}"/>
+                <a16:creationId xmlns:a16="http://schemas.microsoft.com/office/drawing/2014/main" id="{198DFAD9-8CFE-4745-9040-D2104D7E1975}"/>
               </a:ext>
             </a:extLst>
           </p:cNvPr>
@@ -12398,7 +12598,7 @@
           <p:cNvPr id="13" name="">
             <a:extLst xmlns:a="http://schemas.openxmlformats.org/drawingml/2006/main">
               <a:ext uri="{FF2B5EF4-FFF2-40B4-BE49-F238E27FC236}">
-                <a16:creationId xmlns:a16="http://schemas.microsoft.com/office/drawing/2014/main" id="{AF5690B3-C0A6-4CE2-BFF7-830DE04EBAC9}"/>
+                <a16:creationId xmlns:a16="http://schemas.microsoft.com/office/drawing/2014/main" id="{E3D9A49B-37EB-4441-B4B2-C737CC1CC72B}"/>
               </a:ext>
             </a:extLst>
           </p:cNvPr>
@@ -12455,7 +12655,7 @@
           <p:cNvPr id="14" name="">
             <a:extLst xmlns:a="http://schemas.openxmlformats.org/drawingml/2006/main">
               <a:ext uri="{FF2B5EF4-FFF2-40B4-BE49-F238E27FC236}">
-                <a16:creationId xmlns:a16="http://schemas.microsoft.com/office/drawing/2014/main" id="{FC59B2A5-AFA9-47D3-B8DD-90A17999839F}"/>
+                <a16:creationId xmlns:a16="http://schemas.microsoft.com/office/drawing/2014/main" id="{F876FEFE-D79C-45E7-B3A8-512087B1E471}"/>
               </a:ext>
             </a:extLst>
           </p:cNvPr>
@@ -12489,7 +12689,7 @@
           <p:cNvPr id="15" name="">
             <a:extLst xmlns:a="http://schemas.openxmlformats.org/drawingml/2006/main">
               <a:ext uri="{FF2B5EF4-FFF2-40B4-BE49-F238E27FC236}">
-                <a16:creationId xmlns:a16="http://schemas.microsoft.com/office/drawing/2014/main" id="{A5673972-FBDC-48C6-8AF8-DDA52FB93E1E}"/>
+                <a16:creationId xmlns:a16="http://schemas.microsoft.com/office/drawing/2014/main" id="{A8B0CC29-4A0E-4735-BE0A-1574812DBF60}"/>
               </a:ext>
             </a:extLst>
           </p:cNvPr>
@@ -12521,7 +12721,7 @@
           <p:cNvPr id="16" name="">
             <a:extLst xmlns:a="http://schemas.openxmlformats.org/drawingml/2006/main">
               <a:ext uri="{FF2B5EF4-FFF2-40B4-BE49-F238E27FC236}">
-                <a16:creationId xmlns:a16="http://schemas.microsoft.com/office/drawing/2014/main" id="{C8333C63-88A1-40B7-A78D-F42B92CF5A3F}"/>
+                <a16:creationId xmlns:a16="http://schemas.microsoft.com/office/drawing/2014/main" id="{0880C506-BD8E-4345-AB53-B895635490A5}"/>
               </a:ext>
             </a:extLst>
           </p:cNvPr>
@@ -12578,7 +12778,7 @@
           <p:cNvPr id="17" name="">
             <a:extLst xmlns:a="http://schemas.openxmlformats.org/drawingml/2006/main">
               <a:ext uri="{FF2B5EF4-FFF2-40B4-BE49-F238E27FC236}">
-                <a16:creationId xmlns:a16="http://schemas.microsoft.com/office/drawing/2014/main" id="{77A88843-7818-4415-B605-D4C5EDDD8FF0}"/>
+                <a16:creationId xmlns:a16="http://schemas.microsoft.com/office/drawing/2014/main" id="{0EF4BD0D-015A-4706-BB25-B31A55F54D1D}"/>
               </a:ext>
             </a:extLst>
           </p:cNvPr>
@@ -12635,7 +12835,7 @@
           <p:cNvPr id="18" name="">
             <a:extLst xmlns:a="http://schemas.openxmlformats.org/drawingml/2006/main">
               <a:ext uri="{FF2B5EF4-FFF2-40B4-BE49-F238E27FC236}">
-                <a16:creationId xmlns:a16="http://schemas.microsoft.com/office/drawing/2014/main" id="{8EA7A979-0158-42E0-B721-53F5CE6A76B8}"/>
+                <a16:creationId xmlns:a16="http://schemas.microsoft.com/office/drawing/2014/main" id="{E7E6B720-6843-4C15-8D80-1437438D2822}"/>
               </a:ext>
             </a:extLst>
           </p:cNvPr>
@@ -12669,7 +12869,7 @@
           <p:cNvPr id="19" name="">
             <a:extLst xmlns:a="http://schemas.openxmlformats.org/drawingml/2006/main">
               <a:ext uri="{FF2B5EF4-FFF2-40B4-BE49-F238E27FC236}">
-                <a16:creationId xmlns:a16="http://schemas.microsoft.com/office/drawing/2014/main" id="{F7BD3733-F2B4-4907-98E8-2004A35F2162}"/>
+                <a16:creationId xmlns:a16="http://schemas.microsoft.com/office/drawing/2014/main" id="{02EA6F79-3D78-44D7-B9E8-0AEB2FD77468}"/>
               </a:ext>
             </a:extLst>
           </p:cNvPr>
@@ -12701,7 +12901,7 @@
           <p:cNvPr id="20" name="">
             <a:extLst xmlns:a="http://schemas.openxmlformats.org/drawingml/2006/main">
               <a:ext uri="{FF2B5EF4-FFF2-40B4-BE49-F238E27FC236}">
-                <a16:creationId xmlns:a16="http://schemas.microsoft.com/office/drawing/2014/main" id="{F93B23E5-E43A-41EE-A3C6-DB0BA9C08307}"/>
+                <a16:creationId xmlns:a16="http://schemas.microsoft.com/office/drawing/2014/main" id="{5BE0C66C-C4DE-4AAE-AF8E-ABC28305DC45}"/>
               </a:ext>
             </a:extLst>
           </p:cNvPr>
@@ -12758,7 +12958,7 @@
           <p:cNvPr id="21" name="">
             <a:extLst xmlns:a="http://schemas.openxmlformats.org/drawingml/2006/main">
               <a:ext uri="{FF2B5EF4-FFF2-40B4-BE49-F238E27FC236}">
-                <a16:creationId xmlns:a16="http://schemas.microsoft.com/office/drawing/2014/main" id="{08CAB011-4539-445C-BF69-D76CE779CDC9}"/>
+                <a16:creationId xmlns:a16="http://schemas.microsoft.com/office/drawing/2014/main" id="{E9256860-31C9-4BEF-A078-81D2A99C4AAF}"/>
               </a:ext>
             </a:extLst>
           </p:cNvPr>
@@ -12815,7 +13015,7 @@
           <p:cNvPr id="22" name="">
             <a:extLst xmlns:a="http://schemas.openxmlformats.org/drawingml/2006/main">
               <a:ext uri="{FF2B5EF4-FFF2-40B4-BE49-F238E27FC236}">
-                <a16:creationId xmlns:a16="http://schemas.microsoft.com/office/drawing/2014/main" id="{BB6E4455-4635-4C67-B38E-1F5345B9842F}"/>
+                <a16:creationId xmlns:a16="http://schemas.microsoft.com/office/drawing/2014/main" id="{93799C5F-0DD4-45A1-85D4-39B0C33BBCEA}"/>
               </a:ext>
             </a:extLst>
           </p:cNvPr>
@@ -12870,7 +13070,7 @@
     </p:spTree>
     <p:extLst>
       <p:ext uri="{BB962C8B-B14F-4D97-AF65-F5344CB8AC3E}">
-        <p14:creationId xmlns:p14="http://schemas.microsoft.com/office/powerpoint/2010/main" val="2135968269"/>
+        <p14:creationId xmlns:p14="http://schemas.microsoft.com/office/powerpoint/2010/main" val="2075817038"/>
       </p:ext>
     </p:extLst>
   </p:cSld>
@@ -13071,7 +13271,7 @@
           <p:cNvPr id="22" name="">
             <a:extLst xmlns:a="http://schemas.openxmlformats.org/drawingml/2006/main">
               <a:ext uri="{FF2B5EF4-FFF2-40B4-BE49-F238E27FC236}">
-                <a16:creationId xmlns:a16="http://schemas.microsoft.com/office/drawing/2014/main" id="{C857FC27-7B50-4C23-AFCE-2DEFF6221962}"/>
+                <a16:creationId xmlns:a16="http://schemas.microsoft.com/office/drawing/2014/main" id="{FA3E323D-1F41-4385-AD1B-3798CD07222A}"/>
               </a:ext>
             </a:extLst>
           </p:cNvPr>
@@ -13103,7 +13303,7 @@
           <p:cNvPr id="2" name="">
             <a:extLst xmlns:a="http://schemas.openxmlformats.org/drawingml/2006/main">
               <a:ext uri="{FF2B5EF4-FFF2-40B4-BE49-F238E27FC236}">
-                <a16:creationId xmlns:a16="http://schemas.microsoft.com/office/drawing/2014/main" id="{0FAC6028-AA4A-4A18-9711-0017B3B30C13}"/>
+                <a16:creationId xmlns:a16="http://schemas.microsoft.com/office/drawing/2014/main" id="{E55E2F30-FAA9-4E64-8CBB-C06143D1AED5}"/>
               </a:ext>
             </a:extLst>
           </p:cNvPr>
@@ -13160,7 +13360,7 @@
           <p:cNvPr id="3" name="">
             <a:extLst xmlns:a="http://schemas.openxmlformats.org/drawingml/2006/main">
               <a:ext uri="{FF2B5EF4-FFF2-40B4-BE49-F238E27FC236}">
-                <a16:creationId xmlns:a16="http://schemas.microsoft.com/office/drawing/2014/main" id="{35B662C5-B2C3-44E3-ABD4-C13E3208EB4E}"/>
+                <a16:creationId xmlns:a16="http://schemas.microsoft.com/office/drawing/2014/main" id="{E5AD88BD-DB1A-4010-9E0E-33134ED1B00F}"/>
               </a:ext>
             </a:extLst>
           </p:cNvPr>
@@ -13192,7 +13392,7 @@
           <p:cNvPr id="4" name="">
             <a:extLst xmlns:a="http://schemas.openxmlformats.org/drawingml/2006/main">
               <a:ext uri="{FF2B5EF4-FFF2-40B4-BE49-F238E27FC236}">
-                <a16:creationId xmlns:a16="http://schemas.microsoft.com/office/drawing/2014/main" id="{FDC17F76-A158-45B5-B83C-2A51E74CEB17}"/>
+                <a16:creationId xmlns:a16="http://schemas.microsoft.com/office/drawing/2014/main" id="{FE8D7DC2-09F4-4134-A064-5AAED187CFF7}"/>
               </a:ext>
             </a:extLst>
           </p:cNvPr>
@@ -13249,7 +13449,7 @@
           <p:cNvPr id="5" name="">
             <a:extLst xmlns:a="http://schemas.openxmlformats.org/drawingml/2006/main">
               <a:ext uri="{FF2B5EF4-FFF2-40B4-BE49-F238E27FC236}">
-                <a16:creationId xmlns:a16="http://schemas.microsoft.com/office/drawing/2014/main" id="{2120AB7D-E461-4FCC-B5EC-1AF236A0BF38}"/>
+                <a16:creationId xmlns:a16="http://schemas.microsoft.com/office/drawing/2014/main" id="{D1C8467E-01D2-42D7-AAF4-620F38B178C7}"/>
               </a:ext>
             </a:extLst>
           </p:cNvPr>
@@ -13306,7 +13506,7 @@
           <p:cNvPr id="6" name="">
             <a:extLst xmlns:a="http://schemas.openxmlformats.org/drawingml/2006/main">
               <a:ext uri="{FF2B5EF4-FFF2-40B4-BE49-F238E27FC236}">
-                <a16:creationId xmlns:a16="http://schemas.microsoft.com/office/drawing/2014/main" id="{613DF630-1FB4-45E9-A7A2-5B162920E02A}"/>
+                <a16:creationId xmlns:a16="http://schemas.microsoft.com/office/drawing/2014/main" id="{15EE767F-57DD-463E-BE5E-D8B2D0BC5366}"/>
               </a:ext>
             </a:extLst>
           </p:cNvPr>
@@ -13363,7 +13563,7 @@
           <p:cNvPr id="7" name="">
             <a:extLst xmlns:a="http://schemas.openxmlformats.org/drawingml/2006/main">
               <a:ext uri="{FF2B5EF4-FFF2-40B4-BE49-F238E27FC236}">
-                <a16:creationId xmlns:a16="http://schemas.microsoft.com/office/drawing/2014/main" id="{8166C77D-7655-44EC-AAB0-3EB5237288D3}"/>
+                <a16:creationId xmlns:a16="http://schemas.microsoft.com/office/drawing/2014/main" id="{4E21918D-375E-43F2-A844-26A4593A684A}"/>
               </a:ext>
             </a:extLst>
           </p:cNvPr>
@@ -13395,7 +13595,7 @@
           <p:cNvPr id="8" name="">
             <a:extLst xmlns:a="http://schemas.openxmlformats.org/drawingml/2006/main">
               <a:ext uri="{FF2B5EF4-FFF2-40B4-BE49-F238E27FC236}">
-                <a16:creationId xmlns:a16="http://schemas.microsoft.com/office/drawing/2014/main" id="{8E46AA2A-76EC-4E1D-9270-82F249614189}"/>
+                <a16:creationId xmlns:a16="http://schemas.microsoft.com/office/drawing/2014/main" id="{676BCABD-6C12-41A9-A056-22D9654513D7}"/>
               </a:ext>
             </a:extLst>
           </p:cNvPr>
@@ -13452,7 +13652,7 @@
           <p:cNvPr id="9" name="">
             <a:extLst xmlns:a="http://schemas.openxmlformats.org/drawingml/2006/main">
               <a:ext uri="{FF2B5EF4-FFF2-40B4-BE49-F238E27FC236}">
-                <a16:creationId xmlns:a16="http://schemas.microsoft.com/office/drawing/2014/main" id="{B828F5AF-A86F-422B-99D4-54C6DC70746C}"/>
+                <a16:creationId xmlns:a16="http://schemas.microsoft.com/office/drawing/2014/main" id="{054AC455-5FB8-4BF9-84DD-0896BAA3BF81}"/>
               </a:ext>
             </a:extLst>
           </p:cNvPr>
@@ -13509,7 +13709,7 @@
           <p:cNvPr id="10" name="">
             <a:extLst xmlns:a="http://schemas.openxmlformats.org/drawingml/2006/main">
               <a:ext uri="{FF2B5EF4-FFF2-40B4-BE49-F238E27FC236}">
-                <a16:creationId xmlns:a16="http://schemas.microsoft.com/office/drawing/2014/main" id="{4DACE189-B775-4E5E-9624-DC7E2F9D54E4}"/>
+                <a16:creationId xmlns:a16="http://schemas.microsoft.com/office/drawing/2014/main" id="{4CFEA43D-1738-40D1-8878-47CACEB010F0}"/>
               </a:ext>
             </a:extLst>
           </p:cNvPr>
@@ -13543,7 +13743,7 @@
           <p:cNvPr id="11" name="">
             <a:extLst xmlns:a="http://schemas.openxmlformats.org/drawingml/2006/main">
               <a:ext uri="{FF2B5EF4-FFF2-40B4-BE49-F238E27FC236}">
-                <a16:creationId xmlns:a16="http://schemas.microsoft.com/office/drawing/2014/main" id="{BB041036-8194-43F3-AD4D-420FB5EEA0FF}"/>
+                <a16:creationId xmlns:a16="http://schemas.microsoft.com/office/drawing/2014/main" id="{71BA3B29-9C9D-4420-8373-9D117517669E}"/>
               </a:ext>
             </a:extLst>
           </p:cNvPr>
@@ -13575,7 +13775,7 @@
           <p:cNvPr id="12" name="">
             <a:extLst xmlns:a="http://schemas.openxmlformats.org/drawingml/2006/main">
               <a:ext uri="{FF2B5EF4-FFF2-40B4-BE49-F238E27FC236}">
-                <a16:creationId xmlns:a16="http://schemas.microsoft.com/office/drawing/2014/main" id="{26C81F80-7D79-4F65-A416-3A38E38B3EB4}"/>
+                <a16:creationId xmlns:a16="http://schemas.microsoft.com/office/drawing/2014/main" id="{EBDE0660-50A9-41F9-882C-6403D4708208}"/>
               </a:ext>
             </a:extLst>
           </p:cNvPr>
@@ -13632,7 +13832,7 @@
           <p:cNvPr id="13" name="">
             <a:extLst xmlns:a="http://schemas.openxmlformats.org/drawingml/2006/main">
               <a:ext uri="{FF2B5EF4-FFF2-40B4-BE49-F238E27FC236}">
-                <a16:creationId xmlns:a16="http://schemas.microsoft.com/office/drawing/2014/main" id="{3C90C28C-C022-4ACD-B839-56594D76AD07}"/>
+                <a16:creationId xmlns:a16="http://schemas.microsoft.com/office/drawing/2014/main" id="{A5D5C349-2B71-44FE-A697-2747FF652EDD}"/>
               </a:ext>
             </a:extLst>
           </p:cNvPr>
@@ -13689,7 +13889,7 @@
           <p:cNvPr id="14" name="">
             <a:extLst xmlns:a="http://schemas.openxmlformats.org/drawingml/2006/main">
               <a:ext uri="{FF2B5EF4-FFF2-40B4-BE49-F238E27FC236}">
-                <a16:creationId xmlns:a16="http://schemas.microsoft.com/office/drawing/2014/main" id="{FE21D3ED-95D9-48E8-A8F0-7FEC17169AC9}"/>
+                <a16:creationId xmlns:a16="http://schemas.microsoft.com/office/drawing/2014/main" id="{C09BA164-65F3-4CAF-9CE6-2A3FEDDBBA8F}"/>
               </a:ext>
             </a:extLst>
           </p:cNvPr>
@@ -13723,7 +13923,7 @@
           <p:cNvPr id="15" name="">
             <a:extLst xmlns:a="http://schemas.openxmlformats.org/drawingml/2006/main">
               <a:ext uri="{FF2B5EF4-FFF2-40B4-BE49-F238E27FC236}">
-                <a16:creationId xmlns:a16="http://schemas.microsoft.com/office/drawing/2014/main" id="{4E7F526E-6A14-4AD5-906F-F28CA14E7DA3}"/>
+                <a16:creationId xmlns:a16="http://schemas.microsoft.com/office/drawing/2014/main" id="{49E986D5-4C66-457D-8B99-C93EB481226B}"/>
               </a:ext>
             </a:extLst>
           </p:cNvPr>
@@ -13755,7 +13955,7 @@
           <p:cNvPr id="16" name="">
             <a:extLst xmlns:a="http://schemas.openxmlformats.org/drawingml/2006/main">
               <a:ext uri="{FF2B5EF4-FFF2-40B4-BE49-F238E27FC236}">
-                <a16:creationId xmlns:a16="http://schemas.microsoft.com/office/drawing/2014/main" id="{74E0B05F-D79C-45BD-97D1-1EAFEBD1230C}"/>
+                <a16:creationId xmlns:a16="http://schemas.microsoft.com/office/drawing/2014/main" id="{FFADDC8F-78E8-486D-9D6D-3371CA23697C}"/>
               </a:ext>
             </a:extLst>
           </p:cNvPr>
@@ -13812,7 +14012,7 @@
           <p:cNvPr id="17" name="">
             <a:extLst xmlns:a="http://schemas.openxmlformats.org/drawingml/2006/main">
               <a:ext uri="{FF2B5EF4-FFF2-40B4-BE49-F238E27FC236}">
-                <a16:creationId xmlns:a16="http://schemas.microsoft.com/office/drawing/2014/main" id="{CA822632-D81E-457B-8CA8-9D378B882E62}"/>
+                <a16:creationId xmlns:a16="http://schemas.microsoft.com/office/drawing/2014/main" id="{03DB1617-B82C-4E08-AF06-4CB435AA2101}"/>
               </a:ext>
             </a:extLst>
           </p:cNvPr>
@@ -13869,7 +14069,7 @@
           <p:cNvPr id="18" name="">
             <a:extLst xmlns:a="http://schemas.openxmlformats.org/drawingml/2006/main">
               <a:ext uri="{FF2B5EF4-FFF2-40B4-BE49-F238E27FC236}">
-                <a16:creationId xmlns:a16="http://schemas.microsoft.com/office/drawing/2014/main" id="{5AEAA259-DEA2-4989-B688-2E3E9ABF0E10}"/>
+                <a16:creationId xmlns:a16="http://schemas.microsoft.com/office/drawing/2014/main" id="{3C68BD37-774F-4889-9531-EC79A4C60A97}"/>
               </a:ext>
             </a:extLst>
           </p:cNvPr>
@@ -13903,7 +14103,7 @@
           <p:cNvPr id="19" name="">
             <a:extLst xmlns:a="http://schemas.openxmlformats.org/drawingml/2006/main">
               <a:ext uri="{FF2B5EF4-FFF2-40B4-BE49-F238E27FC236}">
-                <a16:creationId xmlns:a16="http://schemas.microsoft.com/office/drawing/2014/main" id="{83DDA273-13E5-4539-8928-3BDDE4152F6E}"/>
+                <a16:creationId xmlns:a16="http://schemas.microsoft.com/office/drawing/2014/main" id="{0748A0DF-ACBE-49A5-AEFF-33BA813702FE}"/>
               </a:ext>
             </a:extLst>
           </p:cNvPr>
@@ -13935,7 +14135,7 @@
           <p:cNvPr id="20" name="">
             <a:extLst xmlns:a="http://schemas.openxmlformats.org/drawingml/2006/main">
               <a:ext uri="{FF2B5EF4-FFF2-40B4-BE49-F238E27FC236}">
-                <a16:creationId xmlns:a16="http://schemas.microsoft.com/office/drawing/2014/main" id="{D8E1AE75-DCAA-49BA-8425-F0C30E122EBF}"/>
+                <a16:creationId xmlns:a16="http://schemas.microsoft.com/office/drawing/2014/main" id="{48B0F9E7-4D51-4DFB-8716-744CBDA94E38}"/>
               </a:ext>
             </a:extLst>
           </p:cNvPr>
@@ -13992,7 +14192,7 @@
           <p:cNvPr id="21" name="">
             <a:extLst xmlns:a="http://schemas.openxmlformats.org/drawingml/2006/main">
               <a:ext uri="{FF2B5EF4-FFF2-40B4-BE49-F238E27FC236}">
-                <a16:creationId xmlns:a16="http://schemas.microsoft.com/office/drawing/2014/main" id="{3045D5AA-CE1A-4B48-908E-D3008478EDC0}"/>
+                <a16:creationId xmlns:a16="http://schemas.microsoft.com/office/drawing/2014/main" id="{032DA16E-233C-4419-8437-BFC4FB071460}"/>
               </a:ext>
             </a:extLst>
           </p:cNvPr>
@@ -14047,7 +14247,7 @@
     </p:spTree>
     <p:extLst>
       <p:ext uri="{BB962C8B-B14F-4D97-AF65-F5344CB8AC3E}">
-        <p14:creationId xmlns:p14="http://schemas.microsoft.com/office/powerpoint/2010/main" val="848479612"/>
+        <p14:creationId xmlns:p14="http://schemas.microsoft.com/office/powerpoint/2010/main" val="746857502"/>
       </p:ext>
     </p:extLst>
   </p:cSld>
